--- a/public/fun/pack/pptx/wedding/결혼식_22_러브스토리중심_섬마을선착장.pptx
+++ b/public/fun/pack/pptx/wedding/결혼식_22_러브스토리중심_섬마을선착장.pptx
@@ -3286,14 +3286,6 @@
 <file path=ppt/slides/slide1.xml><?xml version="1.0" encoding="utf-8"?>
 <p:sld xmlns:a="http://schemas.openxmlformats.org/drawingml/2006/main" xmlns:p="http://schemas.openxmlformats.org/presentationml/2006/main" xmlns:r="http://schemas.openxmlformats.org/officeDocument/2006/relationships">
   <p:cSld>
-    <p:bg>
-      <p:bgPr>
-        <a:solidFill>
-          <a:srgbClr val="EFF5FA"/>
-        </a:solidFill>
-        <a:effectLst/>
-      </p:bgPr>
-    </p:bg>
     <p:spTree>
       <p:nvGrpSpPr>
         <p:cNvPr id="1" name=""/>
@@ -3301,157 +3293,30 @@
         <p:nvPr/>
       </p:nvGrpSpPr>
       <p:grpSpPr/>
-      <p:sp>
-        <p:nvSpPr>
-          <p:cNvPr id="3" name="장식"/>
-          <p:cNvSpPr/>
+      <p:pic>
+        <p:nvPicPr>
+          <p:cNvPr id="3" name="표지 그림" descr="wedding-22.jpg"/>
+          <p:cNvPicPr>
+            <a:picLocks noChangeAspect="1"/>
+          </p:cNvPicPr>
           <p:nvPr/>
-        </p:nvSpPr>
-        <p:spPr>
-          <a:xfrm>
-            <a:off x="7315017" y="960120"/>
-            <a:ext cx="3657508" cy="5897880"/>
-          </a:xfrm>
-          <a:prstGeom prst="round2SameRect">
-            <a:avLst>
-              <a:gd name="adj1" fmla="val 50000"/>
-              <a:gd name="adj2" fmla="val 0"/>
-            </a:avLst>
-          </a:prstGeom>
-          <a:solidFill>
-            <a:srgbClr val="CEE2F3"/>
-          </a:solidFill>
-          <a:ln>
-            <a:noFill/>
-          </a:ln>
-        </p:spPr>
-        <p:txBody>
-          <a:bodyPr rtlCol="0" anchor="ctr"/>
-          <a:lstStyle/>
-          <a:p>
-            <a:pPr algn="ctr"/>
-          </a:p>
-        </p:txBody>
-      </p:sp>
-      <p:sp>
-        <p:nvSpPr>
-          <p:cNvPr id="4" name="장식"/>
-          <p:cNvSpPr/>
-          <p:nvPr/>
-        </p:nvSpPr>
-        <p:spPr>
-          <a:xfrm>
-            <a:off x="7924601" y="1783080"/>
-            <a:ext cx="2438339" cy="5074920"/>
-          </a:xfrm>
-          <a:prstGeom prst="round2SameRect">
-            <a:avLst>
-              <a:gd name="adj1" fmla="val 50000"/>
-              <a:gd name="adj2" fmla="val 0"/>
-            </a:avLst>
-          </a:prstGeom>
-          <a:solidFill>
-            <a:srgbClr val="275A86"/>
-          </a:solidFill>
-          <a:ln>
-            <a:noFill/>
-          </a:ln>
-        </p:spPr>
-        <p:txBody>
-          <a:bodyPr rtlCol="0" anchor="ctr"/>
-          <a:lstStyle/>
-          <a:p>
-            <a:pPr algn="ctr"/>
-          </a:p>
-        </p:txBody>
-      </p:sp>
-      <p:sp>
-        <p:nvSpPr>
-          <p:cNvPr id="5" name="장식"/>
-          <p:cNvSpPr/>
-          <p:nvPr/>
-        </p:nvSpPr>
-        <p:spPr>
-          <a:xfrm>
-            <a:off x="8046518" y="3017533"/>
-            <a:ext cx="2194505" cy="548626"/>
-          </a:xfrm>
-          <a:prstGeom prst="wave">
+        </p:nvPicPr>
+        <p:blipFill>
+          <a:blip r:embed="rId2"/>
+          <a:stretch>
+            <a:fillRect/>
+          </a:stretch>
+        </p:blipFill>
+        <p:spPr>
+          <a:xfrm>
+            <a:off x="0" y="0"/>
+            <a:ext cx="12191695" cy="6858000"/>
+          </a:xfrm>
+          <a:prstGeom prst="rect">
             <a:avLst/>
           </a:prstGeom>
-          <a:solidFill>
-            <a:srgbClr val="CEE2F3"/>
-          </a:solidFill>
-          <a:ln>
-            <a:noFill/>
-          </a:ln>
-        </p:spPr>
-        <p:txBody>
-          <a:bodyPr rtlCol="0" anchor="ctr"/>
-          <a:lstStyle/>
-          <a:p>
-            <a:pPr algn="ctr"/>
-          </a:p>
-        </p:txBody>
-      </p:sp>
-      <p:sp>
-        <p:nvSpPr>
-          <p:cNvPr id="6" name="장식"/>
-          <p:cNvSpPr/>
-          <p:nvPr/>
-        </p:nvSpPr>
-        <p:spPr>
-          <a:xfrm>
-            <a:off x="8046518" y="3493009"/>
-            <a:ext cx="2194505" cy="548626"/>
-          </a:xfrm>
-          <a:prstGeom prst="wave">
-            <a:avLst/>
-          </a:prstGeom>
-          <a:solidFill>
-            <a:srgbClr val="FFFFFF"/>
-          </a:solidFill>
-          <a:ln>
-            <a:noFill/>
-          </a:ln>
-        </p:spPr>
-        <p:txBody>
-          <a:bodyPr rtlCol="0" anchor="ctr"/>
-          <a:lstStyle/>
-          <a:p>
-            <a:pPr algn="ctr"/>
-          </a:p>
-        </p:txBody>
-      </p:sp>
-      <p:sp>
-        <p:nvSpPr>
-          <p:cNvPr id="7" name="장식"/>
-          <p:cNvSpPr/>
-          <p:nvPr/>
-        </p:nvSpPr>
-        <p:spPr>
-          <a:xfrm>
-            <a:off x="8046518" y="3968485"/>
-            <a:ext cx="2194505" cy="548626"/>
-          </a:xfrm>
-          <a:prstGeom prst="wave">
-            <a:avLst/>
-          </a:prstGeom>
-          <a:solidFill>
-            <a:srgbClr val="913B3E"/>
-          </a:solidFill>
-          <a:ln>
-            <a:noFill/>
-          </a:ln>
-        </p:spPr>
-        <p:txBody>
-          <a:bodyPr rtlCol="0" anchor="ctr"/>
-          <a:lstStyle/>
-          <a:p>
-            <a:pPr algn="ctr"/>
-          </a:p>
-        </p:txBody>
-      </p:sp>
+        </p:spPr>
+      </p:pic>
       <p:sp>
         <p:nvSpPr>
           <p:cNvPr id="2" name="Title 1"/>
@@ -3485,21 +3350,21 @@
                   <a:srgbClr val="122A3F"/>
                 </a:solidFill>
               </a:rPr>
-              <a:t>두 사람이 하나 되는 날</a:t>
-            </a:r>
-          </a:p>
-        </p:txBody>
-      </p:sp>
-      <p:sp>
-        <p:nvSpPr>
-          <p:cNvPr id="8" name="한 줄 문구"/>
+              <a:t>저희 결혼합니다</a:t>
+            </a:r>
+          </a:p>
+        </p:txBody>
+      </p:sp>
+      <p:sp>
+        <p:nvSpPr>
+          <p:cNvPr id="4" name="한 줄 문구"/>
           <p:cNvSpPr txBox="1"/>
           <p:nvPr/>
         </p:nvSpPr>
         <p:spPr>
           <a:xfrm>
-            <a:off x="853418" y="3703320"/>
-            <a:ext cx="5852013" cy="822960"/>
+            <a:off x="853418" y="3749039"/>
+            <a:ext cx="6095847" cy="822960"/>
           </a:xfrm>
           <a:prstGeom prst="rect">
             <a:avLst/>
@@ -3523,21 +3388,21 @@
                   <a:srgbClr val="122A3F"/>
                 </a:solidFill>
               </a:rPr>
-              <a:t>섬처럼 외로웠던 두 사람이 만났습니다</a:t>
-            </a:r>
-          </a:p>
-        </p:txBody>
-      </p:sp>
-      <p:sp>
-        <p:nvSpPr>
-          <p:cNvPr id="9" name="안내 문구"/>
+              <a:t>같이 떠난 첫 여름 여행이 시작이었습니다</a:t>
+            </a:r>
+          </a:p>
+        </p:txBody>
+      </p:sp>
+      <p:sp>
+        <p:nvSpPr>
+          <p:cNvPr id="5" name="안내 문구"/>
           <p:cNvSpPr txBox="1"/>
           <p:nvPr/>
         </p:nvSpPr>
         <p:spPr>
           <a:xfrm>
-            <a:off x="853418" y="4572000"/>
-            <a:ext cx="5852013" cy="914400"/>
+            <a:off x="853418" y="4617720"/>
+            <a:ext cx="6095847" cy="914400"/>
           </a:xfrm>
           <a:prstGeom prst="rect">
             <a:avLst/>
@@ -3576,7 +3441,7 @@
                   <a:srgbClr val="666666"/>
                 </a:solidFill>
               </a:rPr>
-              <a:t>2026. 00. 00 · 예식장 이름</a:t>
+              <a:t>2027. 00. 00 · 예식장 이름</a:t>
             </a:r>
           </a:p>
         </p:txBody>
@@ -3641,93 +3506,6 @@
       </p:sp>
       <p:sp>
         <p:nvSpPr>
-          <p:cNvPr id="4" name="장식"/>
-          <p:cNvSpPr/>
-          <p:nvPr/>
-        </p:nvSpPr>
-        <p:spPr>
-          <a:xfrm>
-            <a:off x="10655503" y="557784"/>
-            <a:ext cx="877824" cy="219456"/>
-          </a:xfrm>
-          <a:prstGeom prst="wave">
-            <a:avLst/>
-          </a:prstGeom>
-          <a:solidFill>
-            <a:srgbClr val="CEE2F3"/>
-          </a:solidFill>
-          <a:ln>
-            <a:noFill/>
-          </a:ln>
-        </p:spPr>
-        <p:txBody>
-          <a:bodyPr rtlCol="0" anchor="ctr"/>
-          <a:lstStyle/>
-          <a:p>
-            <a:pPr algn="ctr"/>
-          </a:p>
-        </p:txBody>
-      </p:sp>
-      <p:sp>
-        <p:nvSpPr>
-          <p:cNvPr id="5" name="장식"/>
-          <p:cNvSpPr/>
-          <p:nvPr/>
-        </p:nvSpPr>
-        <p:spPr>
-          <a:xfrm>
-            <a:off x="10655503" y="747979"/>
-            <a:ext cx="877824" cy="219456"/>
-          </a:xfrm>
-          <a:prstGeom prst="wave">
-            <a:avLst/>
-          </a:prstGeom>
-          <a:solidFill>
-            <a:srgbClr val="275A86"/>
-          </a:solidFill>
-          <a:ln>
-            <a:noFill/>
-          </a:ln>
-        </p:spPr>
-        <p:txBody>
-          <a:bodyPr rtlCol="0" anchor="ctr"/>
-          <a:lstStyle/>
-          <a:p>
-            <a:pPr algn="ctr"/>
-          </a:p>
-        </p:txBody>
-      </p:sp>
-      <p:sp>
-        <p:nvSpPr>
-          <p:cNvPr id="6" name="장식"/>
-          <p:cNvSpPr/>
-          <p:nvPr/>
-        </p:nvSpPr>
-        <p:spPr>
-          <a:xfrm>
-            <a:off x="10655503" y="938174"/>
-            <a:ext cx="877824" cy="219456"/>
-          </a:xfrm>
-          <a:prstGeom prst="wave">
-            <a:avLst/>
-          </a:prstGeom>
-          <a:solidFill>
-            <a:srgbClr val="913B3E"/>
-          </a:solidFill>
-          <a:ln>
-            <a:noFill/>
-          </a:ln>
-        </p:spPr>
-        <p:txBody>
-          <a:bodyPr rtlCol="0" anchor="ctr"/>
-          <a:lstStyle/>
-          <a:p>
-            <a:pPr algn="ctr"/>
-          </a:p>
-        </p:txBody>
-      </p:sp>
-      <p:sp>
-        <p:nvSpPr>
           <p:cNvPr id="2" name="Title 1"/>
           <p:cNvSpPr>
             <a:spLocks noGrp="1"/>
@@ -3766,7 +3544,7 @@
       </p:sp>
       <p:sp>
         <p:nvSpPr>
-          <p:cNvPr id="7" name="사진 자리"/>
+          <p:cNvPr id="4" name="사진 자리"/>
           <p:cNvSpPr/>
           <p:nvPr/>
         </p:nvSpPr>
@@ -3812,7 +3590,7 @@
       </p:sp>
       <p:sp>
         <p:nvSpPr>
-          <p:cNvPr id="8" name="TextBox 7"/>
+          <p:cNvPr id="5" name="TextBox 4"/>
           <p:cNvSpPr txBox="1"/>
           <p:nvPr/>
         </p:nvSpPr>
@@ -3850,7 +3628,7 @@
       </p:sp>
       <p:sp>
         <p:nvSpPr>
-          <p:cNvPr id="9" name="TextBox 8"/>
+          <p:cNvPr id="6" name="TextBox 5"/>
           <p:cNvSpPr txBox="1"/>
           <p:nvPr/>
         </p:nvSpPr>
@@ -3918,7 +3696,7 @@
       </p:sp>
       <p:sp>
         <p:nvSpPr>
-          <p:cNvPr id="10" name="사진 자리"/>
+          <p:cNvPr id="7" name="사진 자리"/>
           <p:cNvSpPr/>
           <p:nvPr/>
         </p:nvSpPr>
@@ -3964,7 +3742,7 @@
       </p:sp>
       <p:sp>
         <p:nvSpPr>
-          <p:cNvPr id="11" name="TextBox 10"/>
+          <p:cNvPr id="8" name="TextBox 7"/>
           <p:cNvSpPr txBox="1"/>
           <p:nvPr/>
         </p:nvSpPr>
@@ -4002,7 +3780,7 @@
       </p:sp>
       <p:sp>
         <p:nvSpPr>
-          <p:cNvPr id="12" name="TextBox 11"/>
+          <p:cNvPr id="9" name="TextBox 8"/>
           <p:cNvSpPr txBox="1"/>
           <p:nvPr/>
         </p:nvSpPr>
@@ -4128,93 +3906,6 @@
       </p:sp>
       <p:sp>
         <p:nvSpPr>
-          <p:cNvPr id="4" name="장식"/>
-          <p:cNvSpPr/>
-          <p:nvPr/>
-        </p:nvSpPr>
-        <p:spPr>
-          <a:xfrm>
-            <a:off x="10655503" y="557784"/>
-            <a:ext cx="877824" cy="219456"/>
-          </a:xfrm>
-          <a:prstGeom prst="wave">
-            <a:avLst/>
-          </a:prstGeom>
-          <a:solidFill>
-            <a:srgbClr val="CEE2F3"/>
-          </a:solidFill>
-          <a:ln>
-            <a:noFill/>
-          </a:ln>
-        </p:spPr>
-        <p:txBody>
-          <a:bodyPr rtlCol="0" anchor="ctr"/>
-          <a:lstStyle/>
-          <a:p>
-            <a:pPr algn="ctr"/>
-          </a:p>
-        </p:txBody>
-      </p:sp>
-      <p:sp>
-        <p:nvSpPr>
-          <p:cNvPr id="5" name="장식"/>
-          <p:cNvSpPr/>
-          <p:nvPr/>
-        </p:nvSpPr>
-        <p:spPr>
-          <a:xfrm>
-            <a:off x="10655503" y="747979"/>
-            <a:ext cx="877824" cy="219456"/>
-          </a:xfrm>
-          <a:prstGeom prst="wave">
-            <a:avLst/>
-          </a:prstGeom>
-          <a:solidFill>
-            <a:srgbClr val="275A86"/>
-          </a:solidFill>
-          <a:ln>
-            <a:noFill/>
-          </a:ln>
-        </p:spPr>
-        <p:txBody>
-          <a:bodyPr rtlCol="0" anchor="ctr"/>
-          <a:lstStyle/>
-          <a:p>
-            <a:pPr algn="ctr"/>
-          </a:p>
-        </p:txBody>
-      </p:sp>
-      <p:sp>
-        <p:nvSpPr>
-          <p:cNvPr id="6" name="장식"/>
-          <p:cNvSpPr/>
-          <p:nvPr/>
-        </p:nvSpPr>
-        <p:spPr>
-          <a:xfrm>
-            <a:off x="10655503" y="938174"/>
-            <a:ext cx="877824" cy="219456"/>
-          </a:xfrm>
-          <a:prstGeom prst="wave">
-            <a:avLst/>
-          </a:prstGeom>
-          <a:solidFill>
-            <a:srgbClr val="913B3E"/>
-          </a:solidFill>
-          <a:ln>
-            <a:noFill/>
-          </a:ln>
-        </p:spPr>
-        <p:txBody>
-          <a:bodyPr rtlCol="0" anchor="ctr"/>
-          <a:lstStyle/>
-          <a:p>
-            <a:pPr algn="ctr"/>
-          </a:p>
-        </p:txBody>
-      </p:sp>
-      <p:sp>
-        <p:nvSpPr>
           <p:cNvPr id="2" name="Title 1"/>
           <p:cNvSpPr>
             <a:spLocks noGrp="1"/>
@@ -4253,7 +3944,7 @@
       </p:sp>
       <p:sp>
         <p:nvSpPr>
-          <p:cNvPr id="7" name="타임라인 선"/>
+          <p:cNvPr id="4" name="타임라인 선"/>
           <p:cNvSpPr/>
           <p:nvPr/>
         </p:nvSpPr>
@@ -4282,7 +3973,7 @@
       </p:sp>
       <p:sp>
         <p:nvSpPr>
-          <p:cNvPr id="8" name="때 1"/>
+          <p:cNvPr id="5" name="때 1"/>
           <p:cNvSpPr/>
           <p:nvPr/>
         </p:nvSpPr>
@@ -4313,7 +4004,7 @@
       </p:sp>
       <p:sp>
         <p:nvSpPr>
-          <p:cNvPr id="9" name="TextBox 8"/>
+          <p:cNvPr id="6" name="TextBox 5"/>
           <p:cNvSpPr txBox="1"/>
           <p:nvPr/>
         </p:nvSpPr>
@@ -4351,7 +4042,7 @@
       </p:sp>
       <p:sp>
         <p:nvSpPr>
-          <p:cNvPr id="10" name="TextBox 9"/>
+          <p:cNvPr id="7" name="TextBox 6"/>
           <p:cNvSpPr txBox="1"/>
           <p:nvPr/>
         </p:nvSpPr>
@@ -4389,7 +4080,7 @@
       </p:sp>
       <p:sp>
         <p:nvSpPr>
-          <p:cNvPr id="11" name="TextBox 10"/>
+          <p:cNvPr id="8" name="TextBox 7"/>
           <p:cNvSpPr txBox="1"/>
           <p:nvPr/>
         </p:nvSpPr>
@@ -4427,7 +4118,7 @@
       </p:sp>
       <p:sp>
         <p:nvSpPr>
-          <p:cNvPr id="12" name="때 2"/>
+          <p:cNvPr id="9" name="때 2"/>
           <p:cNvSpPr/>
           <p:nvPr/>
         </p:nvSpPr>
@@ -4458,7 +4149,7 @@
       </p:sp>
       <p:sp>
         <p:nvSpPr>
-          <p:cNvPr id="13" name="TextBox 12"/>
+          <p:cNvPr id="10" name="TextBox 9"/>
           <p:cNvSpPr txBox="1"/>
           <p:nvPr/>
         </p:nvSpPr>
@@ -4496,7 +4187,7 @@
       </p:sp>
       <p:sp>
         <p:nvSpPr>
-          <p:cNvPr id="14" name="TextBox 13"/>
+          <p:cNvPr id="11" name="TextBox 10"/>
           <p:cNvSpPr txBox="1"/>
           <p:nvPr/>
         </p:nvSpPr>
@@ -4534,7 +4225,7 @@
       </p:sp>
       <p:sp>
         <p:nvSpPr>
-          <p:cNvPr id="15" name="TextBox 14"/>
+          <p:cNvPr id="12" name="TextBox 11"/>
           <p:cNvSpPr txBox="1"/>
           <p:nvPr/>
         </p:nvSpPr>
@@ -4572,7 +4263,7 @@
       </p:sp>
       <p:sp>
         <p:nvSpPr>
-          <p:cNvPr id="16" name="때 3"/>
+          <p:cNvPr id="13" name="때 3"/>
           <p:cNvSpPr/>
           <p:nvPr/>
         </p:nvSpPr>
@@ -4603,7 +4294,7 @@
       </p:sp>
       <p:sp>
         <p:nvSpPr>
-          <p:cNvPr id="17" name="TextBox 16"/>
+          <p:cNvPr id="14" name="TextBox 13"/>
           <p:cNvSpPr txBox="1"/>
           <p:nvPr/>
         </p:nvSpPr>
@@ -4641,7 +4332,7 @@
       </p:sp>
       <p:sp>
         <p:nvSpPr>
-          <p:cNvPr id="18" name="TextBox 17"/>
+          <p:cNvPr id="15" name="TextBox 14"/>
           <p:cNvSpPr txBox="1"/>
           <p:nvPr/>
         </p:nvSpPr>
@@ -4679,7 +4370,7 @@
       </p:sp>
       <p:sp>
         <p:nvSpPr>
-          <p:cNvPr id="19" name="TextBox 18"/>
+          <p:cNvPr id="16" name="TextBox 15"/>
           <p:cNvSpPr txBox="1"/>
           <p:nvPr/>
         </p:nvSpPr>
@@ -4717,7 +4408,7 @@
       </p:sp>
       <p:sp>
         <p:nvSpPr>
-          <p:cNvPr id="20" name="때 4"/>
+          <p:cNvPr id="17" name="때 4"/>
           <p:cNvSpPr/>
           <p:nvPr/>
         </p:nvSpPr>
@@ -4748,7 +4439,7 @@
       </p:sp>
       <p:sp>
         <p:nvSpPr>
-          <p:cNvPr id="21" name="TextBox 20"/>
+          <p:cNvPr id="18" name="TextBox 17"/>
           <p:cNvSpPr txBox="1"/>
           <p:nvPr/>
         </p:nvSpPr>
@@ -4786,7 +4477,7 @@
       </p:sp>
       <p:sp>
         <p:nvSpPr>
-          <p:cNvPr id="22" name="TextBox 21"/>
+          <p:cNvPr id="19" name="TextBox 18"/>
           <p:cNvSpPr txBox="1"/>
           <p:nvPr/>
         </p:nvSpPr>
@@ -4824,7 +4515,7 @@
       </p:sp>
       <p:sp>
         <p:nvSpPr>
-          <p:cNvPr id="23" name="TextBox 22"/>
+          <p:cNvPr id="20" name="TextBox 19"/>
           <p:cNvSpPr txBox="1"/>
           <p:nvPr/>
         </p:nvSpPr>
@@ -4920,93 +4611,6 @@
       </p:sp>
       <p:sp>
         <p:nvSpPr>
-          <p:cNvPr id="4" name="장식"/>
-          <p:cNvSpPr/>
-          <p:nvPr/>
-        </p:nvSpPr>
-        <p:spPr>
-          <a:xfrm>
-            <a:off x="10655503" y="557784"/>
-            <a:ext cx="877824" cy="219456"/>
-          </a:xfrm>
-          <a:prstGeom prst="wave">
-            <a:avLst/>
-          </a:prstGeom>
-          <a:solidFill>
-            <a:srgbClr val="CEE2F3"/>
-          </a:solidFill>
-          <a:ln>
-            <a:noFill/>
-          </a:ln>
-        </p:spPr>
-        <p:txBody>
-          <a:bodyPr rtlCol="0" anchor="ctr"/>
-          <a:lstStyle/>
-          <a:p>
-            <a:pPr algn="ctr"/>
-          </a:p>
-        </p:txBody>
-      </p:sp>
-      <p:sp>
-        <p:nvSpPr>
-          <p:cNvPr id="5" name="장식"/>
-          <p:cNvSpPr/>
-          <p:nvPr/>
-        </p:nvSpPr>
-        <p:spPr>
-          <a:xfrm>
-            <a:off x="10655503" y="747979"/>
-            <a:ext cx="877824" cy="219456"/>
-          </a:xfrm>
-          <a:prstGeom prst="wave">
-            <a:avLst/>
-          </a:prstGeom>
-          <a:solidFill>
-            <a:srgbClr val="275A86"/>
-          </a:solidFill>
-          <a:ln>
-            <a:noFill/>
-          </a:ln>
-        </p:spPr>
-        <p:txBody>
-          <a:bodyPr rtlCol="0" anchor="ctr"/>
-          <a:lstStyle/>
-          <a:p>
-            <a:pPr algn="ctr"/>
-          </a:p>
-        </p:txBody>
-      </p:sp>
-      <p:sp>
-        <p:nvSpPr>
-          <p:cNvPr id="6" name="장식"/>
-          <p:cNvSpPr/>
-          <p:nvPr/>
-        </p:nvSpPr>
-        <p:spPr>
-          <a:xfrm>
-            <a:off x="10655503" y="938174"/>
-            <a:ext cx="877824" cy="219456"/>
-          </a:xfrm>
-          <a:prstGeom prst="wave">
-            <a:avLst/>
-          </a:prstGeom>
-          <a:solidFill>
-            <a:srgbClr val="913B3E"/>
-          </a:solidFill>
-          <a:ln>
-            <a:noFill/>
-          </a:ln>
-        </p:spPr>
-        <p:txBody>
-          <a:bodyPr rtlCol="0" anchor="ctr"/>
-          <a:lstStyle/>
-          <a:p>
-            <a:pPr algn="ctr"/>
-          </a:p>
-        </p:txBody>
-      </p:sp>
-      <p:sp>
-        <p:nvSpPr>
           <p:cNvPr id="2" name="Title 1"/>
           <p:cNvSpPr>
             <a:spLocks noGrp="1"/>
@@ -5045,7 +4649,7 @@
       </p:sp>
       <p:sp>
         <p:nvSpPr>
-          <p:cNvPr id="7" name="카드 1"/>
+          <p:cNvPr id="4" name="카드 1"/>
           <p:cNvSpPr/>
           <p:nvPr/>
         </p:nvSpPr>
@@ -5078,7 +4682,7 @@
       </p:sp>
       <p:sp>
         <p:nvSpPr>
-          <p:cNvPr id="8" name="번호 1"/>
+          <p:cNvPr id="5" name="번호 1"/>
           <p:cNvSpPr/>
           <p:nvPr/>
         </p:nvSpPr>
@@ -5121,7 +4725,7 @@
       </p:sp>
       <p:sp>
         <p:nvSpPr>
-          <p:cNvPr id="9" name="TextBox 8"/>
+          <p:cNvPr id="6" name="TextBox 5"/>
           <p:cNvSpPr txBox="1"/>
           <p:nvPr/>
         </p:nvSpPr>
@@ -5159,7 +4763,7 @@
       </p:sp>
       <p:sp>
         <p:nvSpPr>
-          <p:cNvPr id="10" name="TextBox 9"/>
+          <p:cNvPr id="7" name="TextBox 6"/>
           <p:cNvSpPr txBox="1"/>
           <p:nvPr/>
         </p:nvSpPr>
@@ -5197,7 +4801,7 @@
       </p:sp>
       <p:sp>
         <p:nvSpPr>
-          <p:cNvPr id="11" name="카드 2"/>
+          <p:cNvPr id="8" name="카드 2"/>
           <p:cNvSpPr/>
           <p:nvPr/>
         </p:nvSpPr>
@@ -5230,7 +4834,7 @@
       </p:sp>
       <p:sp>
         <p:nvSpPr>
-          <p:cNvPr id="12" name="번호 2"/>
+          <p:cNvPr id="9" name="번호 2"/>
           <p:cNvSpPr/>
           <p:nvPr/>
         </p:nvSpPr>
@@ -5273,7 +4877,7 @@
       </p:sp>
       <p:sp>
         <p:nvSpPr>
-          <p:cNvPr id="13" name="TextBox 12"/>
+          <p:cNvPr id="10" name="TextBox 9"/>
           <p:cNvSpPr txBox="1"/>
           <p:nvPr/>
         </p:nvSpPr>
@@ -5311,7 +4915,7 @@
       </p:sp>
       <p:sp>
         <p:nvSpPr>
-          <p:cNvPr id="14" name="TextBox 13"/>
+          <p:cNvPr id="11" name="TextBox 10"/>
           <p:cNvSpPr txBox="1"/>
           <p:nvPr/>
         </p:nvSpPr>
@@ -5349,7 +4953,7 @@
       </p:sp>
       <p:sp>
         <p:nvSpPr>
-          <p:cNvPr id="15" name="카드 3"/>
+          <p:cNvPr id="12" name="카드 3"/>
           <p:cNvSpPr/>
           <p:nvPr/>
         </p:nvSpPr>
@@ -5382,7 +4986,7 @@
       </p:sp>
       <p:sp>
         <p:nvSpPr>
-          <p:cNvPr id="16" name="번호 3"/>
+          <p:cNvPr id="13" name="번호 3"/>
           <p:cNvSpPr/>
           <p:nvPr/>
         </p:nvSpPr>
@@ -5425,7 +5029,7 @@
       </p:sp>
       <p:sp>
         <p:nvSpPr>
-          <p:cNvPr id="17" name="TextBox 16"/>
+          <p:cNvPr id="14" name="TextBox 13"/>
           <p:cNvSpPr txBox="1"/>
           <p:nvPr/>
         </p:nvSpPr>
@@ -5463,7 +5067,7 @@
       </p:sp>
       <p:sp>
         <p:nvSpPr>
-          <p:cNvPr id="18" name="TextBox 17"/>
+          <p:cNvPr id="15" name="TextBox 14"/>
           <p:cNvSpPr txBox="1"/>
           <p:nvPr/>
         </p:nvSpPr>
@@ -5501,7 +5105,7 @@
       </p:sp>
       <p:sp>
         <p:nvSpPr>
-          <p:cNvPr id="19" name="카드 4"/>
+          <p:cNvPr id="16" name="카드 4"/>
           <p:cNvSpPr/>
           <p:nvPr/>
         </p:nvSpPr>
@@ -5534,7 +5138,7 @@
       </p:sp>
       <p:sp>
         <p:nvSpPr>
-          <p:cNvPr id="20" name="번호 4"/>
+          <p:cNvPr id="17" name="번호 4"/>
           <p:cNvSpPr/>
           <p:nvPr/>
         </p:nvSpPr>
@@ -5577,7 +5181,7 @@
       </p:sp>
       <p:sp>
         <p:nvSpPr>
-          <p:cNvPr id="21" name="TextBox 20"/>
+          <p:cNvPr id="18" name="TextBox 17"/>
           <p:cNvSpPr txBox="1"/>
           <p:nvPr/>
         </p:nvSpPr>
@@ -5615,7 +5219,7 @@
       </p:sp>
       <p:sp>
         <p:nvSpPr>
-          <p:cNvPr id="22" name="TextBox 21"/>
+          <p:cNvPr id="19" name="TextBox 18"/>
           <p:cNvSpPr txBox="1"/>
           <p:nvPr/>
         </p:nvSpPr>
@@ -5711,93 +5315,6 @@
       </p:sp>
       <p:sp>
         <p:nvSpPr>
-          <p:cNvPr id="4" name="장식"/>
-          <p:cNvSpPr/>
-          <p:nvPr/>
-        </p:nvSpPr>
-        <p:spPr>
-          <a:xfrm>
-            <a:off x="10655503" y="557784"/>
-            <a:ext cx="877824" cy="219456"/>
-          </a:xfrm>
-          <a:prstGeom prst="wave">
-            <a:avLst/>
-          </a:prstGeom>
-          <a:solidFill>
-            <a:srgbClr val="CEE2F3"/>
-          </a:solidFill>
-          <a:ln>
-            <a:noFill/>
-          </a:ln>
-        </p:spPr>
-        <p:txBody>
-          <a:bodyPr rtlCol="0" anchor="ctr"/>
-          <a:lstStyle/>
-          <a:p>
-            <a:pPr algn="ctr"/>
-          </a:p>
-        </p:txBody>
-      </p:sp>
-      <p:sp>
-        <p:nvSpPr>
-          <p:cNvPr id="5" name="장식"/>
-          <p:cNvSpPr/>
-          <p:nvPr/>
-        </p:nvSpPr>
-        <p:spPr>
-          <a:xfrm>
-            <a:off x="10655503" y="747979"/>
-            <a:ext cx="877824" cy="219456"/>
-          </a:xfrm>
-          <a:prstGeom prst="wave">
-            <a:avLst/>
-          </a:prstGeom>
-          <a:solidFill>
-            <a:srgbClr val="275A86"/>
-          </a:solidFill>
-          <a:ln>
-            <a:noFill/>
-          </a:ln>
-        </p:spPr>
-        <p:txBody>
-          <a:bodyPr rtlCol="0" anchor="ctr"/>
-          <a:lstStyle/>
-          <a:p>
-            <a:pPr algn="ctr"/>
-          </a:p>
-        </p:txBody>
-      </p:sp>
-      <p:sp>
-        <p:nvSpPr>
-          <p:cNvPr id="6" name="장식"/>
-          <p:cNvSpPr/>
-          <p:nvPr/>
-        </p:nvSpPr>
-        <p:spPr>
-          <a:xfrm>
-            <a:off x="10655503" y="938174"/>
-            <a:ext cx="877824" cy="219456"/>
-          </a:xfrm>
-          <a:prstGeom prst="wave">
-            <a:avLst/>
-          </a:prstGeom>
-          <a:solidFill>
-            <a:srgbClr val="913B3E"/>
-          </a:solidFill>
-          <a:ln>
-            <a:noFill/>
-          </a:ln>
-        </p:spPr>
-        <p:txBody>
-          <a:bodyPr rtlCol="0" anchor="ctr"/>
-          <a:lstStyle/>
-          <a:p>
-            <a:pPr algn="ctr"/>
-          </a:p>
-        </p:txBody>
-      </p:sp>
-      <p:sp>
-        <p:nvSpPr>
           <p:cNvPr id="2" name="Title 1"/>
           <p:cNvSpPr>
             <a:spLocks noGrp="1"/>
@@ -5836,7 +5353,7 @@
       </p:sp>
       <p:sp>
         <p:nvSpPr>
-          <p:cNvPr id="7" name="사진 자리"/>
+          <p:cNvPr id="4" name="사진 자리"/>
           <p:cNvSpPr/>
           <p:nvPr/>
         </p:nvSpPr>
@@ -5884,7 +5401,7 @@
       </p:sp>
       <p:sp>
         <p:nvSpPr>
-          <p:cNvPr id="8" name="사진 자리"/>
+          <p:cNvPr id="5" name="사진 자리"/>
           <p:cNvSpPr/>
           <p:nvPr/>
         </p:nvSpPr>
@@ -5932,7 +5449,7 @@
       </p:sp>
       <p:sp>
         <p:nvSpPr>
-          <p:cNvPr id="9" name="사진 자리"/>
+          <p:cNvPr id="6" name="사진 자리"/>
           <p:cNvSpPr/>
           <p:nvPr/>
         </p:nvSpPr>
@@ -5980,7 +5497,7 @@
       </p:sp>
       <p:sp>
         <p:nvSpPr>
-          <p:cNvPr id="10" name="사진 자리"/>
+          <p:cNvPr id="7" name="사진 자리"/>
           <p:cNvSpPr/>
           <p:nvPr/>
         </p:nvSpPr>
@@ -6028,7 +5545,7 @@
       </p:sp>
       <p:sp>
         <p:nvSpPr>
-          <p:cNvPr id="11" name="사진 자리"/>
+          <p:cNvPr id="8" name="사진 자리"/>
           <p:cNvSpPr/>
           <p:nvPr/>
         </p:nvSpPr>
@@ -6076,7 +5593,7 @@
       </p:sp>
       <p:sp>
         <p:nvSpPr>
-          <p:cNvPr id="12" name="사진 자리"/>
+          <p:cNvPr id="9" name="사진 자리"/>
           <p:cNvSpPr/>
           <p:nvPr/>
         </p:nvSpPr>
@@ -6133,14 +5650,6 @@
 <file path=ppt/slides/slide6.xml><?xml version="1.0" encoding="utf-8"?>
 <p:sld xmlns:a="http://schemas.openxmlformats.org/drawingml/2006/main" xmlns:p="http://schemas.openxmlformats.org/presentationml/2006/main" xmlns:r="http://schemas.openxmlformats.org/officeDocument/2006/relationships">
   <p:cSld>
-    <p:bg>
-      <p:bgPr>
-        <a:solidFill>
-          <a:srgbClr val="EFF5FA"/>
-        </a:solidFill>
-        <a:effectLst/>
-      </p:bgPr>
-    </p:bg>
     <p:spTree>
       <p:nvGrpSpPr>
         <p:cNvPr id="1" name=""/>
@@ -6148,157 +5657,30 @@
         <p:nvPr/>
       </p:nvGrpSpPr>
       <p:grpSpPr/>
-      <p:sp>
-        <p:nvSpPr>
-          <p:cNvPr id="3" name="장식"/>
-          <p:cNvSpPr/>
+      <p:pic>
+        <p:nvPicPr>
+          <p:cNvPr id="3" name="표지 그림" descr="wedding-22.jpg"/>
+          <p:cNvPicPr>
+            <a:picLocks noChangeAspect="1"/>
+          </p:cNvPicPr>
           <p:nvPr/>
-        </p:nvSpPr>
-        <p:spPr>
-          <a:xfrm>
-            <a:off x="7315017" y="960120"/>
-            <a:ext cx="3657508" cy="5897880"/>
-          </a:xfrm>
-          <a:prstGeom prst="round2SameRect">
-            <a:avLst>
-              <a:gd name="adj1" fmla="val 50000"/>
-              <a:gd name="adj2" fmla="val 0"/>
-            </a:avLst>
-          </a:prstGeom>
-          <a:solidFill>
-            <a:srgbClr val="CEE2F3"/>
-          </a:solidFill>
-          <a:ln>
-            <a:noFill/>
-          </a:ln>
-        </p:spPr>
-        <p:txBody>
-          <a:bodyPr rtlCol="0" anchor="ctr"/>
-          <a:lstStyle/>
-          <a:p>
-            <a:pPr algn="ctr"/>
-          </a:p>
-        </p:txBody>
-      </p:sp>
-      <p:sp>
-        <p:nvSpPr>
-          <p:cNvPr id="4" name="장식"/>
-          <p:cNvSpPr/>
-          <p:nvPr/>
-        </p:nvSpPr>
-        <p:spPr>
-          <a:xfrm>
-            <a:off x="7924601" y="1783080"/>
-            <a:ext cx="2438339" cy="5074920"/>
-          </a:xfrm>
-          <a:prstGeom prst="round2SameRect">
-            <a:avLst>
-              <a:gd name="adj1" fmla="val 50000"/>
-              <a:gd name="adj2" fmla="val 0"/>
-            </a:avLst>
-          </a:prstGeom>
-          <a:solidFill>
-            <a:srgbClr val="275A86"/>
-          </a:solidFill>
-          <a:ln>
-            <a:noFill/>
-          </a:ln>
-        </p:spPr>
-        <p:txBody>
-          <a:bodyPr rtlCol="0" anchor="ctr"/>
-          <a:lstStyle/>
-          <a:p>
-            <a:pPr algn="ctr"/>
-          </a:p>
-        </p:txBody>
-      </p:sp>
-      <p:sp>
-        <p:nvSpPr>
-          <p:cNvPr id="5" name="장식"/>
-          <p:cNvSpPr/>
-          <p:nvPr/>
-        </p:nvSpPr>
-        <p:spPr>
-          <a:xfrm>
-            <a:off x="8046518" y="3017533"/>
-            <a:ext cx="2194505" cy="548626"/>
-          </a:xfrm>
-          <a:prstGeom prst="wave">
+        </p:nvPicPr>
+        <p:blipFill>
+          <a:blip r:embed="rId2"/>
+          <a:stretch>
+            <a:fillRect/>
+          </a:stretch>
+        </p:blipFill>
+        <p:spPr>
+          <a:xfrm>
+            <a:off x="0" y="0"/>
+            <a:ext cx="12191695" cy="6858000"/>
+          </a:xfrm>
+          <a:prstGeom prst="rect">
             <a:avLst/>
           </a:prstGeom>
-          <a:solidFill>
-            <a:srgbClr val="CEE2F3"/>
-          </a:solidFill>
-          <a:ln>
-            <a:noFill/>
-          </a:ln>
-        </p:spPr>
-        <p:txBody>
-          <a:bodyPr rtlCol="0" anchor="ctr"/>
-          <a:lstStyle/>
-          <a:p>
-            <a:pPr algn="ctr"/>
-          </a:p>
-        </p:txBody>
-      </p:sp>
-      <p:sp>
-        <p:nvSpPr>
-          <p:cNvPr id="6" name="장식"/>
-          <p:cNvSpPr/>
-          <p:nvPr/>
-        </p:nvSpPr>
-        <p:spPr>
-          <a:xfrm>
-            <a:off x="8046518" y="3493009"/>
-            <a:ext cx="2194505" cy="548626"/>
-          </a:xfrm>
-          <a:prstGeom prst="wave">
-            <a:avLst/>
-          </a:prstGeom>
-          <a:solidFill>
-            <a:srgbClr val="FFFFFF"/>
-          </a:solidFill>
-          <a:ln>
-            <a:noFill/>
-          </a:ln>
-        </p:spPr>
-        <p:txBody>
-          <a:bodyPr rtlCol="0" anchor="ctr"/>
-          <a:lstStyle/>
-          <a:p>
-            <a:pPr algn="ctr"/>
-          </a:p>
-        </p:txBody>
-      </p:sp>
-      <p:sp>
-        <p:nvSpPr>
-          <p:cNvPr id="7" name="장식"/>
-          <p:cNvSpPr/>
-          <p:nvPr/>
-        </p:nvSpPr>
-        <p:spPr>
-          <a:xfrm>
-            <a:off x="8046518" y="3968485"/>
-            <a:ext cx="2194505" cy="548626"/>
-          </a:xfrm>
-          <a:prstGeom prst="wave">
-            <a:avLst/>
-          </a:prstGeom>
-          <a:solidFill>
-            <a:srgbClr val="913B3E"/>
-          </a:solidFill>
-          <a:ln>
-            <a:noFill/>
-          </a:ln>
-        </p:spPr>
-        <p:txBody>
-          <a:bodyPr rtlCol="0" anchor="ctr"/>
-          <a:lstStyle/>
-          <a:p>
-            <a:pPr algn="ctr"/>
-          </a:p>
-        </p:txBody>
-      </p:sp>
+        </p:spPr>
+      </p:pic>
       <p:sp>
         <p:nvSpPr>
           <p:cNvPr id="2" name="Title 1"/>
@@ -6332,21 +5714,21 @@
                   <a:srgbClr val="122A3F"/>
                 </a:solidFill>
               </a:rPr>
-              <a:t>함께해 주셔서 감사합니다</a:t>
-            </a:r>
-          </a:p>
-        </p:txBody>
-      </p:sp>
-      <p:sp>
-        <p:nvSpPr>
-          <p:cNvPr id="8" name="한 줄 문구"/>
+              <a:t>와 주셔서 고맙습니다</a:t>
+            </a:r>
+          </a:p>
+        </p:txBody>
+      </p:sp>
+      <p:sp>
+        <p:nvSpPr>
+          <p:cNvPr id="4" name="한 줄 문구"/>
           <p:cNvSpPr txBox="1"/>
           <p:nvPr/>
         </p:nvSpPr>
         <p:spPr>
           <a:xfrm>
-            <a:off x="853418" y="3703320"/>
-            <a:ext cx="5852013" cy="822960"/>
+            <a:off x="853418" y="3749039"/>
+            <a:ext cx="6095847" cy="822960"/>
           </a:xfrm>
           <a:prstGeom prst="rect">
             <a:avLst/>
@@ -6370,21 +5752,21 @@
                   <a:srgbClr val="122A3F"/>
                 </a:solidFill>
               </a:rPr>
-              <a:t>오늘의 축복을 오래도록 간직하겠습니다</a:t>
-            </a:r>
-          </a:p>
-        </p:txBody>
-      </p:sp>
-      <p:sp>
-        <p:nvSpPr>
-          <p:cNvPr id="9" name="안내 문구"/>
+              <a:t>잘 살겠습니다</a:t>
+            </a:r>
+          </a:p>
+        </p:txBody>
+      </p:sp>
+      <p:sp>
+        <p:nvSpPr>
+          <p:cNvPr id="5" name="안내 문구"/>
           <p:cNvSpPr txBox="1"/>
           <p:nvPr/>
         </p:nvSpPr>
         <p:spPr>
           <a:xfrm>
-            <a:off x="853418" y="4572000"/>
-            <a:ext cx="5852013" cy="914400"/>
+            <a:off x="853418" y="4617720"/>
+            <a:ext cx="6095847" cy="914400"/>
           </a:xfrm>
           <a:prstGeom prst="rect">
             <a:avLst/>

--- a/public/fun/pack/pptx/wedding/결혼식_22_러브스토리중심_섬마을선착장.pptx
+++ b/public/fun/pack/pptx/wedding/결혼식_22_러브스토리중심_섬마을선착장.pptx
@@ -3347,7 +3347,7 @@
             <a:r>
               <a:rPr sz="3600" b="1" i="0">
                 <a:solidFill>
-                  <a:srgbClr val="122A3F"/>
+                  <a:srgbClr val="113B5F"/>
                 </a:solidFill>
               </a:rPr>
               <a:t>저희 결혼합니다</a:t>
@@ -3385,7 +3385,7 @@
             <a:r>
               <a:rPr sz="1700" b="0" i="1">
                 <a:solidFill>
-                  <a:srgbClr val="122A3F"/>
+                  <a:srgbClr val="113B5F"/>
                 </a:solidFill>
               </a:rPr>
               <a:t>같이 떠난 첫 여름 여행이 시작이었습니다</a:t>
@@ -3460,7 +3460,7 @@
     <p:bg>
       <p:bgPr>
         <a:solidFill>
-          <a:srgbClr val="EFF5FA"/>
+          <a:srgbClr val="EEF5FC"/>
         </a:solidFill>
         <a:effectLst/>
       </p:bgPr>
@@ -3490,7 +3490,7 @@
             </a:avLst>
           </a:prstGeom>
           <a:solidFill>
-            <a:srgbClr val="CEE2F3"/>
+            <a:srgbClr val="D1E7FA"/>
           </a:solidFill>
           <a:ln>
             <a:noFill/>
@@ -3534,7 +3534,7 @@
             <a:r>
               <a:rPr sz="3000" b="1" i="0">
                 <a:solidFill>
-                  <a:srgbClr val="122A3F"/>
+                  <a:srgbClr val="113B5F"/>
                 </a:solidFill>
               </a:rPr>
               <a:t>신랑 · 신부 소개</a:t>
@@ -3557,11 +3557,11 @@
             <a:avLst/>
           </a:prstGeom>
           <a:solidFill>
-            <a:srgbClr val="CEE2F3"/>
+            <a:srgbClr val="D1E7FA"/>
           </a:solidFill>
           <a:ln w="19050">
             <a:solidFill>
-              <a:srgbClr val="275A86"/>
+              <a:srgbClr val="267BC5"/>
             </a:solidFill>
             <a:prstDash val="dash"/>
           </a:ln>
@@ -3580,7 +3580,7 @@
             <a:r>
               <a:rPr sz="1200" b="0" i="0">
                 <a:solidFill>
-                  <a:srgbClr val="122A3F"/>
+                  <a:srgbClr val="113B5F"/>
                 </a:solidFill>
               </a:rPr>
               <a:t>사진</a:t>
@@ -3618,7 +3618,7 @@
             <a:r>
               <a:rPr sz="1600" b="1" i="0">
                 <a:solidFill>
-                  <a:srgbClr val="122A3F"/>
+                  <a:srgbClr val="113B5F"/>
                 </a:solidFill>
               </a:rPr>
               <a:t>신랑</a:t>
@@ -3709,11 +3709,11 @@
             <a:avLst/>
           </a:prstGeom>
           <a:solidFill>
-            <a:srgbClr val="CEE2F3"/>
+            <a:srgbClr val="D1E7FA"/>
           </a:solidFill>
           <a:ln w="19050">
             <a:solidFill>
-              <a:srgbClr val="275A86"/>
+              <a:srgbClr val="267BC5"/>
             </a:solidFill>
             <a:prstDash val="dash"/>
           </a:ln>
@@ -3732,7 +3732,7 @@
             <a:r>
               <a:rPr sz="1200" b="0" i="0">
                 <a:solidFill>
-                  <a:srgbClr val="122A3F"/>
+                  <a:srgbClr val="113B5F"/>
                 </a:solidFill>
               </a:rPr>
               <a:t>사진</a:t>
@@ -3770,7 +3770,7 @@
             <a:r>
               <a:rPr sz="1600" b="1" i="0">
                 <a:solidFill>
-                  <a:srgbClr val="122A3F"/>
+                  <a:srgbClr val="113B5F"/>
                 </a:solidFill>
               </a:rPr>
               <a:t>신부</a:t>
@@ -3860,7 +3860,7 @@
     <p:bg>
       <p:bgPr>
         <a:solidFill>
-          <a:srgbClr val="EFF5FA"/>
+          <a:srgbClr val="EEF5FC"/>
         </a:solidFill>
         <a:effectLst/>
       </p:bgPr>
@@ -3890,7 +3890,7 @@
             </a:avLst>
           </a:prstGeom>
           <a:solidFill>
-            <a:srgbClr val="CEE2F3"/>
+            <a:srgbClr val="D1E7FA"/>
           </a:solidFill>
           <a:ln>
             <a:noFill/>
@@ -3934,7 +3934,7 @@
             <a:r>
               <a:rPr sz="3000" b="1" i="0">
                 <a:solidFill>
-                  <a:srgbClr val="122A3F"/>
+                  <a:srgbClr val="113B5F"/>
                 </a:solidFill>
               </a:rPr>
               <a:t>우리의 이야기</a:t>
@@ -3957,7 +3957,7 @@
             <a:avLst/>
           </a:prstGeom>
           <a:solidFill>
-            <a:srgbClr val="CEE2F3"/>
+            <a:srgbClr val="D1E7FA"/>
           </a:solidFill>
           <a:ln>
             <a:noFill/>
@@ -3986,7 +3986,7 @@
             <a:avLst/>
           </a:prstGeom>
           <a:solidFill>
-            <a:srgbClr val="275A86"/>
+            <a:srgbClr val="267BC5"/>
           </a:solidFill>
           <a:ln w="38100">
             <a:solidFill>
@@ -4032,7 +4032,7 @@
             <a:r>
               <a:rPr sz="1600" b="1" i="0">
                 <a:solidFill>
-                  <a:srgbClr val="275A86"/>
+                  <a:srgbClr val="267BC5"/>
                 </a:solidFill>
               </a:rPr>
               <a:t>처음 만난 날</a:t>
@@ -4070,7 +4070,7 @@
             <a:r>
               <a:rPr sz="1800" b="1" i="0">
                 <a:solidFill>
-                  <a:srgbClr val="122A3F"/>
+                  <a:srgbClr val="113B5F"/>
                 </a:solidFill>
               </a:rPr>
               <a:t>첫 만남</a:t>
@@ -4131,7 +4131,7 @@
             <a:avLst/>
           </a:prstGeom>
           <a:solidFill>
-            <a:srgbClr val="275A86"/>
+            <a:srgbClr val="267BC5"/>
           </a:solidFill>
           <a:ln w="38100">
             <a:solidFill>
@@ -4177,7 +4177,7 @@
             <a:r>
               <a:rPr sz="1600" b="1" i="0">
                 <a:solidFill>
-                  <a:srgbClr val="275A86"/>
+                  <a:srgbClr val="267BC5"/>
                 </a:solidFill>
               </a:rPr>
               <a:t>첫 데이트</a:t>
@@ -4215,7 +4215,7 @@
             <a:r>
               <a:rPr sz="1800" b="1" i="0">
                 <a:solidFill>
-                  <a:srgbClr val="122A3F"/>
+                  <a:srgbClr val="113B5F"/>
                 </a:solidFill>
               </a:rPr>
               <a:t>설레던 하루</a:t>
@@ -4276,7 +4276,7 @@
             <a:avLst/>
           </a:prstGeom>
           <a:solidFill>
-            <a:srgbClr val="275A86"/>
+            <a:srgbClr val="267BC5"/>
           </a:solidFill>
           <a:ln w="38100">
             <a:solidFill>
@@ -4322,7 +4322,7 @@
             <a:r>
               <a:rPr sz="1600" b="1" i="0">
                 <a:solidFill>
-                  <a:srgbClr val="275A86"/>
+                  <a:srgbClr val="267BC5"/>
                 </a:solidFill>
               </a:rPr>
               <a:t>프러포즈</a:t>
@@ -4360,7 +4360,7 @@
             <a:r>
               <a:rPr sz="1800" b="1" i="0">
                 <a:solidFill>
-                  <a:srgbClr val="122A3F"/>
+                  <a:srgbClr val="113B5F"/>
                 </a:solidFill>
               </a:rPr>
               <a:t>평생을 약속하다</a:t>
@@ -4421,7 +4421,7 @@
             <a:avLst/>
           </a:prstGeom>
           <a:solidFill>
-            <a:srgbClr val="275A86"/>
+            <a:srgbClr val="267BC5"/>
           </a:solidFill>
           <a:ln w="38100">
             <a:solidFill>
@@ -4467,7 +4467,7 @@
             <a:r>
               <a:rPr sz="1600" b="1" i="0">
                 <a:solidFill>
-                  <a:srgbClr val="275A86"/>
+                  <a:srgbClr val="267BC5"/>
                 </a:solidFill>
               </a:rPr>
               <a:t>결혼</a:t>
@@ -4505,7 +4505,7 @@
             <a:r>
               <a:rPr sz="1800" b="1" i="0">
                 <a:solidFill>
-                  <a:srgbClr val="122A3F"/>
+                  <a:srgbClr val="113B5F"/>
                 </a:solidFill>
               </a:rPr>
               <a:t>오늘의 우리</a:t>
@@ -4565,7 +4565,7 @@
     <p:bg>
       <p:bgPr>
         <a:solidFill>
-          <a:srgbClr val="EFF5FA"/>
+          <a:srgbClr val="EEF5FC"/>
         </a:solidFill>
         <a:effectLst/>
       </p:bgPr>
@@ -4595,7 +4595,7 @@
             </a:avLst>
           </a:prstGeom>
           <a:solidFill>
-            <a:srgbClr val="CEE2F3"/>
+            <a:srgbClr val="D1E7FA"/>
           </a:solidFill>
           <a:ln>
             <a:noFill/>
@@ -4639,7 +4639,7 @@
             <a:r>
               <a:rPr sz="3000" b="1" i="0">
                 <a:solidFill>
-                  <a:srgbClr val="122A3F"/>
+                  <a:srgbClr val="113B5F"/>
                 </a:solidFill>
               </a:rPr>
               <a:t>우리의 첫 번째</a:t>
@@ -4664,11 +4664,11 @@
             </a:avLst>
           </a:prstGeom>
           <a:solidFill>
-            <a:srgbClr val="EFF5FA"/>
+            <a:srgbClr val="EEF5FC"/>
           </a:solidFill>
           <a:ln w="15875">
             <a:solidFill>
-              <a:srgbClr val="CEE2F3"/>
+              <a:srgbClr val="D1E7FA"/>
             </a:solidFill>
           </a:ln>
         </p:spPr>
@@ -4695,7 +4695,7 @@
             <a:avLst/>
           </a:prstGeom>
           <a:solidFill>
-            <a:srgbClr val="275A86"/>
+            <a:srgbClr val="267BC5"/>
           </a:solidFill>
           <a:ln>
             <a:noFill/>
@@ -4753,7 +4753,7 @@
             <a:r>
               <a:rPr sz="1800" b="1" i="0">
                 <a:solidFill>
-                  <a:srgbClr val="122A3F"/>
+                  <a:srgbClr val="113B5F"/>
                 </a:solidFill>
               </a:rPr>
               <a:t>첫 여행</a:t>
@@ -4816,11 +4816,11 @@
             </a:avLst>
           </a:prstGeom>
           <a:solidFill>
-            <a:srgbClr val="EFF5FA"/>
+            <a:srgbClr val="EEF5FC"/>
           </a:solidFill>
           <a:ln w="15875">
             <a:solidFill>
-              <a:srgbClr val="CEE2F3"/>
+              <a:srgbClr val="D1E7FA"/>
             </a:solidFill>
           </a:ln>
         </p:spPr>
@@ -4847,7 +4847,7 @@
             <a:avLst/>
           </a:prstGeom>
           <a:solidFill>
-            <a:srgbClr val="275A86"/>
+            <a:srgbClr val="267BC5"/>
           </a:solidFill>
           <a:ln>
             <a:noFill/>
@@ -4905,7 +4905,7 @@
             <a:r>
               <a:rPr sz="1800" b="1" i="0">
                 <a:solidFill>
-                  <a:srgbClr val="122A3F"/>
+                  <a:srgbClr val="113B5F"/>
                 </a:solidFill>
               </a:rPr>
               <a:t>첫 선물</a:t>
@@ -4968,11 +4968,11 @@
             </a:avLst>
           </a:prstGeom>
           <a:solidFill>
-            <a:srgbClr val="EFF5FA"/>
+            <a:srgbClr val="EEF5FC"/>
           </a:solidFill>
           <a:ln w="15875">
             <a:solidFill>
-              <a:srgbClr val="CEE2F3"/>
+              <a:srgbClr val="D1E7FA"/>
             </a:solidFill>
           </a:ln>
         </p:spPr>
@@ -4999,7 +4999,7 @@
             <a:avLst/>
           </a:prstGeom>
           <a:solidFill>
-            <a:srgbClr val="275A86"/>
+            <a:srgbClr val="267BC5"/>
           </a:solidFill>
           <a:ln>
             <a:noFill/>
@@ -5057,7 +5057,7 @@
             <a:r>
               <a:rPr sz="1800" b="1" i="0">
                 <a:solidFill>
-                  <a:srgbClr val="122A3F"/>
+                  <a:srgbClr val="113B5F"/>
                 </a:solidFill>
               </a:rPr>
               <a:t>첫 다툼</a:t>
@@ -5120,11 +5120,11 @@
             </a:avLst>
           </a:prstGeom>
           <a:solidFill>
-            <a:srgbClr val="EFF5FA"/>
+            <a:srgbClr val="EEF5FC"/>
           </a:solidFill>
           <a:ln w="15875">
             <a:solidFill>
-              <a:srgbClr val="CEE2F3"/>
+              <a:srgbClr val="D1E7FA"/>
             </a:solidFill>
           </a:ln>
         </p:spPr>
@@ -5151,7 +5151,7 @@
             <a:avLst/>
           </a:prstGeom>
           <a:solidFill>
-            <a:srgbClr val="275A86"/>
+            <a:srgbClr val="267BC5"/>
           </a:solidFill>
           <a:ln>
             <a:noFill/>
@@ -5209,7 +5209,7 @@
             <a:r>
               <a:rPr sz="1800" b="1" i="0">
                 <a:solidFill>
-                  <a:srgbClr val="122A3F"/>
+                  <a:srgbClr val="113B5F"/>
                 </a:solidFill>
               </a:rPr>
               <a:t>첫 약속</a:t>
@@ -5269,7 +5269,7 @@
     <p:bg>
       <p:bgPr>
         <a:solidFill>
-          <a:srgbClr val="EFF5FA"/>
+          <a:srgbClr val="EEF5FC"/>
         </a:solidFill>
         <a:effectLst/>
       </p:bgPr>
@@ -5299,7 +5299,7 @@
             </a:avLst>
           </a:prstGeom>
           <a:solidFill>
-            <a:srgbClr val="CEE2F3"/>
+            <a:srgbClr val="D1E7FA"/>
           </a:solidFill>
           <a:ln>
             <a:noFill/>
@@ -5343,7 +5343,7 @@
             <a:r>
               <a:rPr sz="3000" b="1" i="0">
                 <a:solidFill>
-                  <a:srgbClr val="122A3F"/>
+                  <a:srgbClr val="113B5F"/>
                 </a:solidFill>
               </a:rPr>
               <a:t>웨딩 사진</a:t>
@@ -5368,11 +5368,11 @@
             </a:avLst>
           </a:prstGeom>
           <a:solidFill>
-            <a:srgbClr val="CEE2F3"/>
+            <a:srgbClr val="D1E7FA"/>
           </a:solidFill>
           <a:ln w="19050">
             <a:solidFill>
-              <a:srgbClr val="275A86"/>
+              <a:srgbClr val="267BC5"/>
             </a:solidFill>
             <a:prstDash val="dash"/>
           </a:ln>
@@ -5391,7 +5391,7 @@
             <a:r>
               <a:rPr sz="1200" b="0" i="0">
                 <a:solidFill>
-                  <a:srgbClr val="122A3F"/>
+                  <a:srgbClr val="113B5F"/>
                 </a:solidFill>
               </a:rPr>
               <a:t>사진 1</a:t>
@@ -5416,11 +5416,11 @@
             </a:avLst>
           </a:prstGeom>
           <a:solidFill>
-            <a:srgbClr val="CEE2F3"/>
+            <a:srgbClr val="D1E7FA"/>
           </a:solidFill>
           <a:ln w="19050">
             <a:solidFill>
-              <a:srgbClr val="275A86"/>
+              <a:srgbClr val="267BC5"/>
             </a:solidFill>
             <a:prstDash val="dash"/>
           </a:ln>
@@ -5439,7 +5439,7 @@
             <a:r>
               <a:rPr sz="1200" b="0" i="0">
                 <a:solidFill>
-                  <a:srgbClr val="122A3F"/>
+                  <a:srgbClr val="113B5F"/>
                 </a:solidFill>
               </a:rPr>
               <a:t>사진 2</a:t>
@@ -5464,11 +5464,11 @@
             </a:avLst>
           </a:prstGeom>
           <a:solidFill>
-            <a:srgbClr val="CEE2F3"/>
+            <a:srgbClr val="D1E7FA"/>
           </a:solidFill>
           <a:ln w="19050">
             <a:solidFill>
-              <a:srgbClr val="275A86"/>
+              <a:srgbClr val="267BC5"/>
             </a:solidFill>
             <a:prstDash val="dash"/>
           </a:ln>
@@ -5487,7 +5487,7 @@
             <a:r>
               <a:rPr sz="1200" b="0" i="0">
                 <a:solidFill>
-                  <a:srgbClr val="122A3F"/>
+                  <a:srgbClr val="113B5F"/>
                 </a:solidFill>
               </a:rPr>
               <a:t>사진 3</a:t>
@@ -5512,11 +5512,11 @@
             </a:avLst>
           </a:prstGeom>
           <a:solidFill>
-            <a:srgbClr val="CEE2F3"/>
+            <a:srgbClr val="D1E7FA"/>
           </a:solidFill>
           <a:ln w="19050">
             <a:solidFill>
-              <a:srgbClr val="275A86"/>
+              <a:srgbClr val="267BC5"/>
             </a:solidFill>
             <a:prstDash val="dash"/>
           </a:ln>
@@ -5535,7 +5535,7 @@
             <a:r>
               <a:rPr sz="1200" b="0" i="0">
                 <a:solidFill>
-                  <a:srgbClr val="122A3F"/>
+                  <a:srgbClr val="113B5F"/>
                 </a:solidFill>
               </a:rPr>
               <a:t>사진 4</a:t>
@@ -5560,11 +5560,11 @@
             </a:avLst>
           </a:prstGeom>
           <a:solidFill>
-            <a:srgbClr val="CEE2F3"/>
+            <a:srgbClr val="D1E7FA"/>
           </a:solidFill>
           <a:ln w="19050">
             <a:solidFill>
-              <a:srgbClr val="275A86"/>
+              <a:srgbClr val="267BC5"/>
             </a:solidFill>
             <a:prstDash val="dash"/>
           </a:ln>
@@ -5583,7 +5583,7 @@
             <a:r>
               <a:rPr sz="1200" b="0" i="0">
                 <a:solidFill>
-                  <a:srgbClr val="122A3F"/>
+                  <a:srgbClr val="113B5F"/>
                 </a:solidFill>
               </a:rPr>
               <a:t>사진 5</a:t>
@@ -5608,11 +5608,11 @@
             </a:avLst>
           </a:prstGeom>
           <a:solidFill>
-            <a:srgbClr val="CEE2F3"/>
+            <a:srgbClr val="D1E7FA"/>
           </a:solidFill>
           <a:ln w="19050">
             <a:solidFill>
-              <a:srgbClr val="275A86"/>
+              <a:srgbClr val="267BC5"/>
             </a:solidFill>
             <a:prstDash val="dash"/>
           </a:ln>
@@ -5631,7 +5631,7 @@
             <a:r>
               <a:rPr sz="1200" b="0" i="0">
                 <a:solidFill>
-                  <a:srgbClr val="122A3F"/>
+                  <a:srgbClr val="113B5F"/>
                 </a:solidFill>
               </a:rPr>
               <a:t>사진 6</a:t>
@@ -5711,7 +5711,7 @@
             <a:r>
               <a:rPr sz="3400" b="1" i="0">
                 <a:solidFill>
-                  <a:srgbClr val="122A3F"/>
+                  <a:srgbClr val="113B5F"/>
                 </a:solidFill>
               </a:rPr>
               <a:t>와 주셔서 고맙습니다</a:t>
@@ -5749,7 +5749,7 @@
             <a:r>
               <a:rPr sz="1700" b="0" i="1">
                 <a:solidFill>
-                  <a:srgbClr val="122A3F"/>
+                  <a:srgbClr val="113B5F"/>
                 </a:solidFill>
               </a:rPr>
               <a:t>잘 살겠습니다</a:t>
@@ -5814,34 +5814,34 @@
         <a:sysClr val="window" lastClr="FFFFFF"/>
       </a:lt1>
       <a:dk2>
-        <a:srgbClr val="122A3F"/>
+        <a:srgbClr val="113B5F"/>
       </a:dk2>
       <a:lt2>
-        <a:srgbClr val="EFF5FA"/>
+        <a:srgbClr val="EEF5FC"/>
       </a:lt2>
       <a:accent1>
-        <a:srgbClr val="275A86"/>
+        <a:srgbClr val="267BC5"/>
       </a:accent1>
       <a:accent2>
-        <a:srgbClr val="913B3E"/>
+        <a:srgbClr val="209DB6"/>
       </a:accent2>
       <a:accent3>
-        <a:srgbClr val="122A3F"/>
+        <a:srgbClr val="113B5F"/>
       </a:accent3>
       <a:accent4>
-        <a:srgbClr val="CEE2F3"/>
+        <a:srgbClr val="D1E7FA"/>
       </a:accent4>
       <a:accent5>
-        <a:srgbClr val="5C4A62"/>
+        <a:srgbClr val="238CBE"/>
       </a:accent5>
       <a:accent6>
-        <a:srgbClr val="717F8C"/>
+        <a:srgbClr val="70899F"/>
       </a:accent6>
       <a:hlink>
-        <a:srgbClr val="275A86"/>
+        <a:srgbClr val="267BC5"/>
       </a:hlink>
       <a:folHlink>
-        <a:srgbClr val="122A3F"/>
+        <a:srgbClr val="113B5F"/>
       </a:folHlink>
     </a:clrScheme>
     <a:fontScheme name="Office">

--- a/public/fun/pack/pptx/wedding/결혼식_22_러브스토리중심_섬마을선착장.pptx
+++ b/public/fun/pack/pptx/wedding/결혼식_22_러브스토리중심_섬마을선착장.pptx
@@ -3286,6 +3286,14 @@
 <file path=ppt/slides/slide1.xml><?xml version="1.0" encoding="utf-8"?>
 <p:sld xmlns:a="http://schemas.openxmlformats.org/drawingml/2006/main" xmlns:p="http://schemas.openxmlformats.org/presentationml/2006/main" xmlns:r="http://schemas.openxmlformats.org/officeDocument/2006/relationships">
   <p:cSld>
+    <p:bg>
+      <p:bgPr>
+        <a:solidFill>
+          <a:srgbClr val="EAF4FD"/>
+        </a:solidFill>
+        <a:effectLst/>
+      </p:bgPr>
+    </p:bg>
     <p:spTree>
       <p:nvGrpSpPr>
         <p:cNvPr id="1" name=""/>
@@ -3293,30 +3301,120 @@
         <p:nvPr/>
       </p:nvGrpSpPr>
       <p:grpSpPr/>
-      <p:pic>
-        <p:nvPicPr>
-          <p:cNvPr id="3" name="표지 그림" descr="wedding-22.jpg"/>
-          <p:cNvPicPr>
-            <a:picLocks noChangeAspect="1"/>
-          </p:cNvPicPr>
-          <p:nvPr/>
-        </p:nvPicPr>
-        <p:blipFill>
-          <a:blip r:embed="rId2"/>
-          <a:stretch>
-            <a:fillRect/>
-          </a:stretch>
-        </p:blipFill>
-        <p:spPr>
-          <a:xfrm>
-            <a:off x="0" y="0"/>
-            <a:ext cx="12191695" cy="6858000"/>
+      <p:sp>
+        <p:nvSpPr>
+          <p:cNvPr id="3" name="사진 자리"/>
+          <p:cNvSpPr/>
+          <p:nvPr/>
+        </p:nvSpPr>
+        <p:spPr>
+          <a:xfrm>
+            <a:off x="1463003" y="960120"/>
+            <a:ext cx="3657508" cy="4526280"/>
+          </a:xfrm>
+          <a:prstGeom prst="roundRect">
+            <a:avLst>
+              <a:gd name="adj" fmla="val 4000"/>
+            </a:avLst>
+          </a:prstGeom>
+          <a:solidFill>
+            <a:srgbClr val="A5CFF3"/>
+          </a:solidFill>
+          <a:ln>
+            <a:noFill/>
+          </a:ln>
+        </p:spPr>
+        <p:txBody>
+          <a:bodyPr rtlCol="0" anchor="ctr" wrap="square" lIns="54864" rIns="54864" tIns="27432" bIns="27432">
+            <a:noAutofit/>
+          </a:bodyPr>
+          <a:lstStyle/>
+          <a:p>
+            <a:pPr algn="ctr">
+              <a:lnSpc>
+                <a:spcPct val="100000"/>
+              </a:lnSpc>
+            </a:pPr>
+            <a:r>
+              <a:rPr sz="1400" b="0" i="0">
+                <a:solidFill>
+                  <a:srgbClr val="273949"/>
+                </a:solidFill>
+              </a:rPr>
+              <a:t>사진을 넣어 주세요</a:t>
+            </a:r>
+          </a:p>
+        </p:txBody>
+      </p:sp>
+      <p:sp>
+        <p:nvSpPr>
+          <p:cNvPr id="4" name="장식"/>
+          <p:cNvSpPr/>
+          <p:nvPr/>
+        </p:nvSpPr>
+        <p:spPr>
+          <a:xfrm>
+            <a:off x="975335" y="1234439"/>
+            <a:ext cx="3657508" cy="4526280"/>
+          </a:xfrm>
+          <a:prstGeom prst="roundRect">
+            <a:avLst>
+              <a:gd name="adj" fmla="val 4000"/>
+            </a:avLst>
+          </a:prstGeom>
+          <a:noFill/>
+          <a:ln w="9525">
+            <a:solidFill>
+              <a:srgbClr val="26231F"/>
+            </a:solidFill>
+          </a:ln>
+        </p:spPr>
+        <p:txBody>
+          <a:bodyPr rtlCol="0" anchor="ctr"/>
+          <a:lstStyle/>
+          <a:p>
+            <a:pPr algn="ctr"/>
+          </a:p>
+        </p:txBody>
+      </p:sp>
+      <p:sp>
+        <p:nvSpPr>
+          <p:cNvPr id="5" name="라벨"/>
+          <p:cNvSpPr txBox="1"/>
+          <p:nvPr/>
+        </p:nvSpPr>
+        <p:spPr>
+          <a:xfrm>
+            <a:off x="6827349" y="2148840"/>
+            <a:ext cx="4632844" cy="274320"/>
           </a:xfrm>
           <a:prstGeom prst="rect">
             <a:avLst/>
           </a:prstGeom>
-        </p:spPr>
-      </p:pic>
+          <a:noFill/>
+        </p:spPr>
+        <p:txBody>
+          <a:bodyPr wrap="square" lIns="54864" rIns="54864" tIns="27432" bIns="27432" anchor="t">
+            <a:noAutofit/>
+          </a:bodyPr>
+          <a:lstStyle/>
+          <a:p>
+            <a:pPr algn="l">
+              <a:lnSpc>
+                <a:spcPct val="115000"/>
+              </a:lnSpc>
+            </a:pPr>
+            <a:r>
+              <a:rPr sz="1000" b="1" i="0" spc="250">
+                <a:solidFill>
+                  <a:srgbClr val="26231F"/>
+                </a:solidFill>
+              </a:rPr>
+              <a:t>WEDDING</a:t>
+            </a:r>
+          </a:p>
+        </p:txBody>
+      </p:sp>
       <p:sp>
         <p:nvSpPr>
           <p:cNvPr id="2" name="Title 1"/>
@@ -3329,8 +3427,8 @@
         </p:nvSpPr>
         <p:spPr>
           <a:xfrm>
-            <a:off x="853418" y="2057400"/>
-            <a:ext cx="6095847" cy="1554480"/>
+            <a:off x="6827349" y="2606040"/>
+            <a:ext cx="4632844" cy="1188720"/>
           </a:xfrm>
         </p:spPr>
         <p:txBody>
@@ -3347,7 +3445,7 @@
             <a:r>
               <a:rPr sz="3600" b="1" i="0">
                 <a:solidFill>
-                  <a:srgbClr val="113B5F"/>
+                  <a:srgbClr val="26231F"/>
                 </a:solidFill>
               </a:rPr>
               <a:t>저희 결혼합니다</a:t>
@@ -3357,14 +3455,14 @@
       </p:sp>
       <p:sp>
         <p:nvSpPr>
-          <p:cNvPr id="4" name="한 줄 문구"/>
+          <p:cNvPr id="6" name="한 줄 문구"/>
           <p:cNvSpPr txBox="1"/>
           <p:nvPr/>
         </p:nvSpPr>
         <p:spPr>
           <a:xfrm>
-            <a:off x="853418" y="3749039"/>
-            <a:ext cx="6095847" cy="822960"/>
+            <a:off x="6827349" y="3886200"/>
+            <a:ext cx="4632844" cy="822960"/>
           </a:xfrm>
           <a:prstGeom prst="rect">
             <a:avLst/>
@@ -3383,26 +3481,26 @@
               </a:lnSpc>
             </a:pPr>
             <a:r>
-              <a:rPr sz="1700" b="0" i="1">
-                <a:solidFill>
-                  <a:srgbClr val="113B5F"/>
+              <a:rPr sz="1700" b="0" i="0">
+                <a:solidFill>
+                  <a:srgbClr val="26231F"/>
                 </a:solidFill>
               </a:rPr>
-              <a:t>같이 떠난 첫 여름 여행이 시작이었습니다</a:t>
-            </a:r>
-          </a:p>
-        </p:txBody>
-      </p:sp>
-      <p:sp>
-        <p:nvSpPr>
-          <p:cNvPr id="5" name="안내 문구"/>
+              <a:t>같이 떠난 첫 여행이 시작이었습니다</a:t>
+            </a:r>
+          </a:p>
+        </p:txBody>
+      </p:sp>
+      <p:sp>
+        <p:nvSpPr>
+          <p:cNvPr id="7" name="안내 문구"/>
           <p:cNvSpPr txBox="1"/>
           <p:nvPr/>
         </p:nvSpPr>
         <p:spPr>
           <a:xfrm>
-            <a:off x="853418" y="4617720"/>
-            <a:ext cx="6095847" cy="914400"/>
+            <a:off x="6827349" y="4754880"/>
+            <a:ext cx="4632844" cy="914400"/>
           </a:xfrm>
           <a:prstGeom prst="rect">
             <a:avLst/>
@@ -3423,7 +3521,7 @@
             <a:r>
               <a:rPr sz="1400" b="0" i="0">
                 <a:solidFill>
-                  <a:srgbClr val="666666"/>
+                  <a:srgbClr val="26231F"/>
                 </a:solidFill>
               </a:rPr>
               <a:t>신랑 이름 ♥ 신부 이름</a:t>
@@ -3438,10 +3536,10 @@
             <a:r>
               <a:rPr sz="1400" b="0" i="0">
                 <a:solidFill>
-                  <a:srgbClr val="666666"/>
+                  <a:srgbClr val="26231F"/>
                 </a:solidFill>
               </a:rPr>
-              <a:t>2027. 00. 00 · 예식장 이름</a:t>
+              <a:t>날짜 입력 · 예식장 이름</a:t>
             </a:r>
           </a:p>
         </p:txBody>
@@ -3460,7 +3558,7 @@
     <p:bg>
       <p:bgPr>
         <a:solidFill>
-          <a:srgbClr val="EEF5FC"/>
+          <a:srgbClr val="FFFFFF"/>
         </a:solidFill>
         <a:effectLst/>
       </p:bgPr>
@@ -3479,18 +3577,17 @@
           <p:nvPr/>
         </p:nvSpPr>
         <p:spPr>
-          <a:xfrm rot="10800000">
-            <a:off x="10637215" y="0"/>
-            <a:ext cx="914400" cy="1554480"/>
-          </a:xfrm>
-          <a:prstGeom prst="round2SameRect">
+          <a:xfrm>
+            <a:off x="640080" y="566928"/>
+            <a:ext cx="64008" cy="868680"/>
+          </a:xfrm>
+          <a:prstGeom prst="roundRect">
             <a:avLst>
-              <a:gd name="adj1" fmla="val 50000"/>
-              <a:gd name="adj2" fmla="val 0"/>
+              <a:gd name="adj" fmla="val 50000"/>
             </a:avLst>
           </a:prstGeom>
           <a:solidFill>
-            <a:srgbClr val="D1E7FA"/>
+            <a:srgbClr val="7BB6EA"/>
           </a:solidFill>
           <a:ln>
             <a:noFill/>
@@ -3506,6 +3603,73 @@
       </p:sp>
       <p:sp>
         <p:nvSpPr>
+          <p:cNvPr id="4" name="상단 라벨"/>
+          <p:cNvSpPr txBox="1"/>
+          <p:nvPr/>
+        </p:nvSpPr>
+        <p:spPr>
+          <a:xfrm>
+            <a:off x="868680" y="274320"/>
+            <a:ext cx="5486400" cy="274320"/>
+          </a:xfrm>
+          <a:prstGeom prst="rect">
+            <a:avLst/>
+          </a:prstGeom>
+          <a:noFill/>
+        </p:spPr>
+        <p:txBody>
+          <a:bodyPr wrap="square" lIns="54864" rIns="54864" tIns="27432" bIns="27432" anchor="ctr">
+            <a:noAutofit/>
+          </a:bodyPr>
+          <a:lstStyle/>
+          <a:p>
+            <a:pPr algn="l">
+              <a:lnSpc>
+                <a:spcPct val="115000"/>
+              </a:lnSpc>
+            </a:pPr>
+            <a:r>
+              <a:rPr sz="900" b="1" i="0" spc="250">
+                <a:solidFill>
+                  <a:srgbClr val="8E8780"/>
+                </a:solidFill>
+              </a:rPr>
+              <a:t>WEDDING</a:t>
+            </a:r>
+          </a:p>
+        </p:txBody>
+      </p:sp>
+      <p:sp>
+        <p:nvSpPr>
+          <p:cNvPr id="5" name="포인트"/>
+          <p:cNvSpPr/>
+          <p:nvPr/>
+        </p:nvSpPr>
+        <p:spPr>
+          <a:xfrm>
+            <a:off x="11167567" y="667512"/>
+            <a:ext cx="310896" cy="310896"/>
+          </a:xfrm>
+          <a:prstGeom prst="sun">
+            <a:avLst/>
+          </a:prstGeom>
+          <a:solidFill>
+            <a:srgbClr val="A5CFF3"/>
+          </a:solidFill>
+          <a:ln>
+            <a:noFill/>
+          </a:ln>
+        </p:spPr>
+        <p:txBody>
+          <a:bodyPr rtlCol="0" anchor="ctr"/>
+          <a:lstStyle/>
+          <a:p>
+            <a:pPr algn="ctr"/>
+          </a:p>
+        </p:txBody>
+      </p:sp>
+      <p:sp>
+        <p:nvSpPr>
           <p:cNvPr id="2" name="Title 1"/>
           <p:cNvSpPr>
             <a:spLocks noGrp="1"/>
@@ -3516,8 +3680,8 @@
         </p:nvSpPr>
         <p:spPr>
           <a:xfrm>
-            <a:off x="640080" y="457200"/>
-            <a:ext cx="9722815" cy="868680"/>
+            <a:off x="868680" y="566928"/>
+            <a:ext cx="9448495" cy="868680"/>
           </a:xfrm>
         </p:spPr>
         <p:txBody>
@@ -3534,7 +3698,7 @@
             <a:r>
               <a:rPr sz="3000" b="1" i="0">
                 <a:solidFill>
-                  <a:srgbClr val="113B5F"/>
+                  <a:srgbClr val="26231F"/>
                 </a:solidFill>
               </a:rPr>
               <a:t>신랑 · 신부 소개</a:t>
@@ -3544,14 +3708,14 @@
       </p:sp>
       <p:sp>
         <p:nvSpPr>
-          <p:cNvPr id="4" name="사진 자리"/>
+          <p:cNvPr id="6" name="사진 자리"/>
           <p:cNvSpPr/>
           <p:nvPr/>
         </p:nvSpPr>
         <p:spPr>
           <a:xfrm>
-            <a:off x="1939213" y="1600200"/>
-            <a:ext cx="2400300" cy="2400300"/>
+            <a:off x="1996363" y="1783080"/>
+            <a:ext cx="2286000" cy="2286000"/>
           </a:xfrm>
           <a:prstGeom prst="ellipse">
             <a:avLst/>
@@ -3560,9 +3724,7 @@
             <a:srgbClr val="D1E7FA"/>
           </a:solidFill>
           <a:ln w="19050">
-            <a:solidFill>
-              <a:srgbClr val="267BC5"/>
-            </a:solidFill>
+            <a:noFill/>
             <a:prstDash val="dash"/>
           </a:ln>
         </p:spPr>
@@ -3580,7 +3742,7 @@
             <a:r>
               <a:rPr sz="1200" b="0" i="0">
                 <a:solidFill>
-                  <a:srgbClr val="113B5F"/>
+                  <a:srgbClr val="8E8780"/>
                 </a:solidFill>
               </a:rPr>
               <a:t>사진</a:t>
@@ -3590,13 +3752,13 @@
       </p:sp>
       <p:sp>
         <p:nvSpPr>
-          <p:cNvPr id="5" name="TextBox 4"/>
+          <p:cNvPr id="7" name="TextBox 6"/>
           <p:cNvSpPr txBox="1"/>
           <p:nvPr/>
         </p:nvSpPr>
         <p:spPr>
           <a:xfrm>
-            <a:off x="640080" y="4091939"/>
+            <a:off x="640080" y="4160520"/>
             <a:ext cx="4998567" cy="411480"/>
           </a:xfrm>
           <a:prstGeom prst="rect">
@@ -3618,7 +3780,7 @@
             <a:r>
               <a:rPr sz="1600" b="1" i="0">
                 <a:solidFill>
-                  <a:srgbClr val="113B5F"/>
+                  <a:srgbClr val="273949"/>
                 </a:solidFill>
               </a:rPr>
               <a:t>신랑</a:t>
@@ -3628,14 +3790,14 @@
       </p:sp>
       <p:sp>
         <p:nvSpPr>
-          <p:cNvPr id="6" name="TextBox 5"/>
+          <p:cNvPr id="8" name="TextBox 7"/>
           <p:cNvSpPr txBox="1"/>
           <p:nvPr/>
         </p:nvSpPr>
         <p:spPr>
           <a:xfrm>
-            <a:off x="731519" y="4549140"/>
-            <a:ext cx="4815687" cy="1851660"/>
+            <a:off x="731519" y="4617720"/>
+            <a:ext cx="4815687" cy="1737360"/>
           </a:xfrm>
           <a:prstGeom prst="rect">
             <a:avLst/>
@@ -3696,14 +3858,14 @@
       </p:sp>
       <p:sp>
         <p:nvSpPr>
-          <p:cNvPr id="7" name="사진 자리"/>
+          <p:cNvPr id="9" name="사진 자리"/>
           <p:cNvSpPr/>
           <p:nvPr/>
         </p:nvSpPr>
         <p:spPr>
           <a:xfrm>
-            <a:off x="7852181" y="1600200"/>
-            <a:ext cx="2400300" cy="2400300"/>
+            <a:off x="7909331" y="1783080"/>
+            <a:ext cx="2286000" cy="2286000"/>
           </a:xfrm>
           <a:prstGeom prst="ellipse">
             <a:avLst/>
@@ -3712,9 +3874,7 @@
             <a:srgbClr val="D1E7FA"/>
           </a:solidFill>
           <a:ln w="19050">
-            <a:solidFill>
-              <a:srgbClr val="267BC5"/>
-            </a:solidFill>
+            <a:noFill/>
             <a:prstDash val="dash"/>
           </a:ln>
         </p:spPr>
@@ -3732,7 +3892,7 @@
             <a:r>
               <a:rPr sz="1200" b="0" i="0">
                 <a:solidFill>
-                  <a:srgbClr val="113B5F"/>
+                  <a:srgbClr val="8E8780"/>
                 </a:solidFill>
               </a:rPr>
               <a:t>사진</a:t>
@@ -3742,13 +3902,13 @@
       </p:sp>
       <p:sp>
         <p:nvSpPr>
-          <p:cNvPr id="8" name="TextBox 7"/>
+          <p:cNvPr id="10" name="TextBox 9"/>
           <p:cNvSpPr txBox="1"/>
           <p:nvPr/>
         </p:nvSpPr>
         <p:spPr>
           <a:xfrm>
-            <a:off x="6553047" y="4091939"/>
+            <a:off x="6553047" y="4160520"/>
             <a:ext cx="4998567" cy="411480"/>
           </a:xfrm>
           <a:prstGeom prst="rect">
@@ -3770,7 +3930,7 @@
             <a:r>
               <a:rPr sz="1600" b="1" i="0">
                 <a:solidFill>
-                  <a:srgbClr val="113B5F"/>
+                  <a:srgbClr val="273949"/>
                 </a:solidFill>
               </a:rPr>
               <a:t>신부</a:t>
@@ -3780,14 +3940,14 @@
       </p:sp>
       <p:sp>
         <p:nvSpPr>
-          <p:cNvPr id="9" name="TextBox 8"/>
+          <p:cNvPr id="11" name="TextBox 10"/>
           <p:cNvSpPr txBox="1"/>
           <p:nvPr/>
         </p:nvSpPr>
         <p:spPr>
           <a:xfrm>
-            <a:off x="6644487" y="4549140"/>
-            <a:ext cx="4815687" cy="1851660"/>
+            <a:off x="6644487" y="4617720"/>
+            <a:ext cx="4815687" cy="1737360"/>
           </a:xfrm>
           <a:prstGeom prst="rect">
             <a:avLst/>
@@ -3860,7 +4020,7 @@
     <p:bg>
       <p:bgPr>
         <a:solidFill>
-          <a:srgbClr val="EEF5FC"/>
+          <a:srgbClr val="FFFFFF"/>
         </a:solidFill>
         <a:effectLst/>
       </p:bgPr>
@@ -3879,15 +4039,148 @@
           <p:nvPr/>
         </p:nvSpPr>
         <p:spPr>
-          <a:xfrm rot="10800000">
-            <a:off x="10637215" y="0"/>
-            <a:ext cx="914400" cy="1554480"/>
-          </a:xfrm>
-          <a:prstGeom prst="round2SameRect">
+          <a:xfrm>
+            <a:off x="640080" y="566928"/>
+            <a:ext cx="64008" cy="868680"/>
+          </a:xfrm>
+          <a:prstGeom prst="roundRect">
             <a:avLst>
-              <a:gd name="adj1" fmla="val 50000"/>
-              <a:gd name="adj2" fmla="val 0"/>
+              <a:gd name="adj" fmla="val 50000"/>
             </a:avLst>
+          </a:prstGeom>
+          <a:solidFill>
+            <a:srgbClr val="7BB6EA"/>
+          </a:solidFill>
+          <a:ln>
+            <a:noFill/>
+          </a:ln>
+        </p:spPr>
+        <p:txBody>
+          <a:bodyPr rtlCol="0" anchor="ctr"/>
+          <a:lstStyle/>
+          <a:p>
+            <a:pPr algn="ctr"/>
+          </a:p>
+        </p:txBody>
+      </p:sp>
+      <p:sp>
+        <p:nvSpPr>
+          <p:cNvPr id="4" name="상단 라벨"/>
+          <p:cNvSpPr txBox="1"/>
+          <p:nvPr/>
+        </p:nvSpPr>
+        <p:spPr>
+          <a:xfrm>
+            <a:off x="868680" y="274320"/>
+            <a:ext cx="5486400" cy="274320"/>
+          </a:xfrm>
+          <a:prstGeom prst="rect">
+            <a:avLst/>
+          </a:prstGeom>
+          <a:noFill/>
+        </p:spPr>
+        <p:txBody>
+          <a:bodyPr wrap="square" lIns="54864" rIns="54864" tIns="27432" bIns="27432" anchor="ctr">
+            <a:noAutofit/>
+          </a:bodyPr>
+          <a:lstStyle/>
+          <a:p>
+            <a:pPr algn="l">
+              <a:lnSpc>
+                <a:spcPct val="115000"/>
+              </a:lnSpc>
+            </a:pPr>
+            <a:r>
+              <a:rPr sz="900" b="1" i="0" spc="250">
+                <a:solidFill>
+                  <a:srgbClr val="8E8780"/>
+                </a:solidFill>
+              </a:rPr>
+              <a:t>WEDDING</a:t>
+            </a:r>
+          </a:p>
+        </p:txBody>
+      </p:sp>
+      <p:sp>
+        <p:nvSpPr>
+          <p:cNvPr id="5" name="포인트"/>
+          <p:cNvSpPr/>
+          <p:nvPr/>
+        </p:nvSpPr>
+        <p:spPr>
+          <a:xfrm>
+            <a:off x="11167567" y="667512"/>
+            <a:ext cx="310896" cy="310896"/>
+          </a:xfrm>
+          <a:prstGeom prst="sun">
+            <a:avLst/>
+          </a:prstGeom>
+          <a:solidFill>
+            <a:srgbClr val="A5CFF3"/>
+          </a:solidFill>
+          <a:ln>
+            <a:noFill/>
+          </a:ln>
+        </p:spPr>
+        <p:txBody>
+          <a:bodyPr rtlCol="0" anchor="ctr"/>
+          <a:lstStyle/>
+          <a:p>
+            <a:pPr algn="ctr"/>
+          </a:p>
+        </p:txBody>
+      </p:sp>
+      <p:sp>
+        <p:nvSpPr>
+          <p:cNvPr id="2" name="Title 1"/>
+          <p:cNvSpPr>
+            <a:spLocks noGrp="1"/>
+          </p:cNvSpPr>
+          <p:nvPr>
+            <p:ph type="title"/>
+          </p:nvPr>
+        </p:nvSpPr>
+        <p:spPr>
+          <a:xfrm>
+            <a:off x="868680" y="566928"/>
+            <a:ext cx="9448495" cy="868680"/>
+          </a:xfrm>
+        </p:spPr>
+        <p:txBody>
+          <a:bodyPr wrap="square" lIns="54864" rIns="54864" tIns="27432" bIns="27432" anchor="ctr">
+            <a:noAutofit/>
+          </a:bodyPr>
+          <a:lstStyle/>
+          <a:p>
+            <a:pPr algn="l">
+              <a:lnSpc>
+                <a:spcPct val="105000"/>
+              </a:lnSpc>
+            </a:pPr>
+            <a:r>
+              <a:rPr sz="3000" b="1" i="0">
+                <a:solidFill>
+                  <a:srgbClr val="26231F"/>
+                </a:solidFill>
+              </a:rPr>
+              <a:t>우리의 이야기</a:t>
+            </a:r>
+          </a:p>
+        </p:txBody>
+      </p:sp>
+      <p:sp>
+        <p:nvSpPr>
+          <p:cNvPr id="6" name="타임라인 선"/>
+          <p:cNvSpPr/>
+          <p:nvPr/>
+        </p:nvSpPr>
+        <p:spPr>
+          <a:xfrm>
+            <a:off x="640080" y="3520440"/>
+            <a:ext cx="10911535" cy="54864"/>
+          </a:xfrm>
+          <a:prstGeom prst="rect">
+            <a:avLst/>
           </a:prstGeom>
           <a:solidFill>
             <a:srgbClr val="D1E7FA"/>
@@ -3906,87 +4199,20 @@
       </p:sp>
       <p:sp>
         <p:nvSpPr>
-          <p:cNvPr id="2" name="Title 1"/>
-          <p:cNvSpPr>
-            <a:spLocks noGrp="1"/>
-          </p:cNvSpPr>
-          <p:nvPr>
-            <p:ph type="title"/>
-          </p:nvPr>
-        </p:nvSpPr>
-        <p:spPr>
-          <a:xfrm>
-            <a:off x="640080" y="457200"/>
-            <a:ext cx="9722815" cy="868680"/>
-          </a:xfrm>
-        </p:spPr>
-        <p:txBody>
-          <a:bodyPr wrap="square" lIns="54864" rIns="54864" tIns="27432" bIns="27432" anchor="ctr">
-            <a:noAutofit/>
-          </a:bodyPr>
-          <a:lstStyle/>
-          <a:p>
-            <a:pPr algn="l">
-              <a:lnSpc>
-                <a:spcPct val="105000"/>
-              </a:lnSpc>
-            </a:pPr>
-            <a:r>
-              <a:rPr sz="3000" b="1" i="0">
-                <a:solidFill>
-                  <a:srgbClr val="113B5F"/>
-                </a:solidFill>
-              </a:rPr>
-              <a:t>우리의 이야기</a:t>
-            </a:r>
-          </a:p>
-        </p:txBody>
-      </p:sp>
-      <p:sp>
-        <p:nvSpPr>
-          <p:cNvPr id="4" name="타임라인 선"/>
+          <p:cNvPr id="7" name="때 1"/>
           <p:cNvSpPr/>
           <p:nvPr/>
         </p:nvSpPr>
         <p:spPr>
           <a:xfrm>
-            <a:off x="640080" y="3337560"/>
-            <a:ext cx="10911535" cy="54864"/>
-          </a:xfrm>
-          <a:prstGeom prst="rect">
-            <a:avLst/>
-          </a:prstGeom>
-          <a:solidFill>
-            <a:srgbClr val="D1E7FA"/>
-          </a:solidFill>
-          <a:ln>
-            <a:noFill/>
-          </a:ln>
-        </p:spPr>
-        <p:txBody>
-          <a:bodyPr rtlCol="0" anchor="ctr"/>
-          <a:lstStyle/>
-          <a:p>
-            <a:pPr algn="ctr"/>
-          </a:p>
-        </p:txBody>
-      </p:sp>
-      <p:sp>
-        <p:nvSpPr>
-          <p:cNvPr id="5" name="때 1"/>
-          <p:cNvSpPr/>
-          <p:nvPr/>
-        </p:nvSpPr>
-        <p:spPr>
-          <a:xfrm>
-            <a:off x="1802853" y="3154680"/>
+            <a:off x="1802853" y="3337560"/>
             <a:ext cx="402336" cy="402336"/>
           </a:xfrm>
           <a:prstGeom prst="ellipse">
             <a:avLst/>
           </a:prstGeom>
           <a:solidFill>
-            <a:srgbClr val="267BC5"/>
+            <a:srgbClr val="7BB6EA"/>
           </a:solidFill>
           <a:ln w="38100">
             <a:solidFill>
@@ -4004,13 +4230,13 @@
       </p:sp>
       <p:sp>
         <p:nvSpPr>
-          <p:cNvPr id="6" name="TextBox 5"/>
+          <p:cNvPr id="8" name="TextBox 7"/>
           <p:cNvSpPr txBox="1"/>
           <p:nvPr/>
         </p:nvSpPr>
         <p:spPr>
           <a:xfrm>
-            <a:off x="685800" y="2514600"/>
+            <a:off x="685800" y="2697480"/>
             <a:ext cx="2636443" cy="457200"/>
           </a:xfrm>
           <a:prstGeom prst="rect">
@@ -4032,7 +4258,7 @@
             <a:r>
               <a:rPr sz="1600" b="1" i="0">
                 <a:solidFill>
-                  <a:srgbClr val="267BC5"/>
+                  <a:srgbClr val="7BB6EA"/>
                 </a:solidFill>
               </a:rPr>
               <a:t>처음 만난 날</a:t>
@@ -4042,13 +4268,13 @@
       </p:sp>
       <p:sp>
         <p:nvSpPr>
-          <p:cNvPr id="7" name="TextBox 6"/>
+          <p:cNvPr id="9" name="TextBox 8"/>
           <p:cNvSpPr txBox="1"/>
           <p:nvPr/>
         </p:nvSpPr>
         <p:spPr>
           <a:xfrm>
-            <a:off x="731519" y="3703320"/>
+            <a:off x="731519" y="3886200"/>
             <a:ext cx="2545003" cy="457200"/>
           </a:xfrm>
           <a:prstGeom prst="rect">
@@ -4070,7 +4296,7 @@
             <a:r>
               <a:rPr sz="1800" b="1" i="0">
                 <a:solidFill>
-                  <a:srgbClr val="113B5F"/>
+                  <a:srgbClr val="273949"/>
                 </a:solidFill>
               </a:rPr>
               <a:t>첫 만남</a:t>
@@ -4080,13 +4306,13 @@
       </p:sp>
       <p:sp>
         <p:nvSpPr>
-          <p:cNvPr id="8" name="TextBox 7"/>
+          <p:cNvPr id="10" name="TextBox 9"/>
           <p:cNvSpPr txBox="1"/>
           <p:nvPr/>
         </p:nvSpPr>
         <p:spPr>
           <a:xfrm>
-            <a:off x="731519" y="4206240"/>
+            <a:off x="731519" y="4389120"/>
             <a:ext cx="2545003" cy="1645920"/>
           </a:xfrm>
           <a:prstGeom prst="rect">
@@ -4108,7 +4334,7 @@
             <a:r>
               <a:rPr sz="1500" b="0" i="0">
                 <a:solidFill>
-                  <a:srgbClr val="2B2B2B"/>
+                  <a:srgbClr val="26231F"/>
                 </a:solidFill>
               </a:rPr>
               <a:t>어디에서 어떻게?</a:t>
@@ -4118,20 +4344,20 @@
       </p:sp>
       <p:sp>
         <p:nvSpPr>
-          <p:cNvPr id="9" name="때 2"/>
+          <p:cNvPr id="11" name="때 2"/>
           <p:cNvSpPr/>
           <p:nvPr/>
         </p:nvSpPr>
         <p:spPr>
           <a:xfrm>
-            <a:off x="4530737" y="3154680"/>
+            <a:off x="4530737" y="3337560"/>
             <a:ext cx="402336" cy="402336"/>
           </a:xfrm>
           <a:prstGeom prst="ellipse">
             <a:avLst/>
           </a:prstGeom>
           <a:solidFill>
-            <a:srgbClr val="267BC5"/>
+            <a:srgbClr val="7BB6EA"/>
           </a:solidFill>
           <a:ln w="38100">
             <a:solidFill>
@@ -4149,13 +4375,13 @@
       </p:sp>
       <p:sp>
         <p:nvSpPr>
-          <p:cNvPr id="10" name="TextBox 9"/>
+          <p:cNvPr id="12" name="TextBox 11"/>
           <p:cNvSpPr txBox="1"/>
           <p:nvPr/>
         </p:nvSpPr>
         <p:spPr>
           <a:xfrm>
-            <a:off x="3413683" y="2514600"/>
+            <a:off x="3413683" y="2697480"/>
             <a:ext cx="2636443" cy="457200"/>
           </a:xfrm>
           <a:prstGeom prst="rect">
@@ -4177,7 +4403,7 @@
             <a:r>
               <a:rPr sz="1600" b="1" i="0">
                 <a:solidFill>
-                  <a:srgbClr val="267BC5"/>
+                  <a:srgbClr val="7BB6EA"/>
                 </a:solidFill>
               </a:rPr>
               <a:t>첫 데이트</a:t>
@@ -4187,13 +4413,13 @@
       </p:sp>
       <p:sp>
         <p:nvSpPr>
-          <p:cNvPr id="11" name="TextBox 10"/>
+          <p:cNvPr id="13" name="TextBox 12"/>
           <p:cNvSpPr txBox="1"/>
           <p:nvPr/>
         </p:nvSpPr>
         <p:spPr>
           <a:xfrm>
-            <a:off x="3459403" y="3703320"/>
+            <a:off x="3459403" y="3886200"/>
             <a:ext cx="2545003" cy="457200"/>
           </a:xfrm>
           <a:prstGeom prst="rect">
@@ -4215,7 +4441,7 @@
             <a:r>
               <a:rPr sz="1800" b="1" i="0">
                 <a:solidFill>
-                  <a:srgbClr val="113B5F"/>
+                  <a:srgbClr val="273949"/>
                 </a:solidFill>
               </a:rPr>
               <a:t>설레던 하루</a:t>
@@ -4225,13 +4451,13 @@
       </p:sp>
       <p:sp>
         <p:nvSpPr>
-          <p:cNvPr id="12" name="TextBox 11"/>
+          <p:cNvPr id="14" name="TextBox 13"/>
           <p:cNvSpPr txBox="1"/>
           <p:nvPr/>
         </p:nvSpPr>
         <p:spPr>
           <a:xfrm>
-            <a:off x="3459403" y="4206240"/>
+            <a:off x="3459403" y="4389120"/>
             <a:ext cx="2545003" cy="1645920"/>
           </a:xfrm>
           <a:prstGeom prst="rect">
@@ -4253,7 +4479,7 @@
             <a:r>
               <a:rPr sz="1500" b="0" i="0">
                 <a:solidFill>
-                  <a:srgbClr val="2B2B2B"/>
+                  <a:srgbClr val="26231F"/>
                 </a:solidFill>
               </a:rPr>
               <a:t>무엇을 했나요?</a:t>
@@ -4263,20 +4489,20 @@
       </p:sp>
       <p:sp>
         <p:nvSpPr>
-          <p:cNvPr id="13" name="때 3"/>
+          <p:cNvPr id="15" name="때 3"/>
           <p:cNvSpPr/>
           <p:nvPr/>
         </p:nvSpPr>
         <p:spPr>
           <a:xfrm>
-            <a:off x="7258621" y="3154680"/>
+            <a:off x="7258621" y="3337560"/>
             <a:ext cx="402336" cy="402336"/>
           </a:xfrm>
           <a:prstGeom prst="ellipse">
             <a:avLst/>
           </a:prstGeom>
           <a:solidFill>
-            <a:srgbClr val="267BC5"/>
+            <a:srgbClr val="7BB6EA"/>
           </a:solidFill>
           <a:ln w="38100">
             <a:solidFill>
@@ -4294,13 +4520,13 @@
       </p:sp>
       <p:sp>
         <p:nvSpPr>
-          <p:cNvPr id="14" name="TextBox 13"/>
+          <p:cNvPr id="16" name="TextBox 15"/>
           <p:cNvSpPr txBox="1"/>
           <p:nvPr/>
         </p:nvSpPr>
         <p:spPr>
           <a:xfrm>
-            <a:off x="6141567" y="2514600"/>
+            <a:off x="6141567" y="2697480"/>
             <a:ext cx="2636443" cy="457200"/>
           </a:xfrm>
           <a:prstGeom prst="rect">
@@ -4322,7 +4548,7 @@
             <a:r>
               <a:rPr sz="1600" b="1" i="0">
                 <a:solidFill>
-                  <a:srgbClr val="267BC5"/>
+                  <a:srgbClr val="7BB6EA"/>
                 </a:solidFill>
               </a:rPr>
               <a:t>프러포즈</a:t>
@@ -4332,13 +4558,13 @@
       </p:sp>
       <p:sp>
         <p:nvSpPr>
-          <p:cNvPr id="15" name="TextBox 14"/>
+          <p:cNvPr id="17" name="TextBox 16"/>
           <p:cNvSpPr txBox="1"/>
           <p:nvPr/>
         </p:nvSpPr>
         <p:spPr>
           <a:xfrm>
-            <a:off x="6187287" y="3703320"/>
+            <a:off x="6187287" y="3886200"/>
             <a:ext cx="2545003" cy="457200"/>
           </a:xfrm>
           <a:prstGeom prst="rect">
@@ -4360,7 +4586,7 @@
             <a:r>
               <a:rPr sz="1800" b="1" i="0">
                 <a:solidFill>
-                  <a:srgbClr val="113B5F"/>
+                  <a:srgbClr val="273949"/>
                 </a:solidFill>
               </a:rPr>
               <a:t>평생을 약속하다</a:t>
@@ -4370,13 +4596,13 @@
       </p:sp>
       <p:sp>
         <p:nvSpPr>
-          <p:cNvPr id="16" name="TextBox 15"/>
+          <p:cNvPr id="18" name="TextBox 17"/>
           <p:cNvSpPr txBox="1"/>
           <p:nvPr/>
         </p:nvSpPr>
         <p:spPr>
           <a:xfrm>
-            <a:off x="6187287" y="4206240"/>
+            <a:off x="6187287" y="4389120"/>
             <a:ext cx="2545003" cy="1645920"/>
           </a:xfrm>
           <a:prstGeom prst="rect">
@@ -4398,7 +4624,7 @@
             <a:r>
               <a:rPr sz="1500" b="0" i="0">
                 <a:solidFill>
-                  <a:srgbClr val="2B2B2B"/>
+                  <a:srgbClr val="26231F"/>
                 </a:solidFill>
               </a:rPr>
               <a:t>그날의 이야기</a:t>
@@ -4408,20 +4634,20 @@
       </p:sp>
       <p:sp>
         <p:nvSpPr>
-          <p:cNvPr id="17" name="때 4"/>
+          <p:cNvPr id="19" name="때 4"/>
           <p:cNvSpPr/>
           <p:nvPr/>
         </p:nvSpPr>
         <p:spPr>
           <a:xfrm>
-            <a:off x="9986505" y="3154680"/>
+            <a:off x="9986505" y="3337560"/>
             <a:ext cx="402336" cy="402336"/>
           </a:xfrm>
           <a:prstGeom prst="ellipse">
             <a:avLst/>
           </a:prstGeom>
           <a:solidFill>
-            <a:srgbClr val="267BC5"/>
+            <a:srgbClr val="7BB6EA"/>
           </a:solidFill>
           <a:ln w="38100">
             <a:solidFill>
@@ -4439,13 +4665,13 @@
       </p:sp>
       <p:sp>
         <p:nvSpPr>
-          <p:cNvPr id="18" name="TextBox 17"/>
+          <p:cNvPr id="20" name="TextBox 19"/>
           <p:cNvSpPr txBox="1"/>
           <p:nvPr/>
         </p:nvSpPr>
         <p:spPr>
           <a:xfrm>
-            <a:off x="8869451" y="2514600"/>
+            <a:off x="8869451" y="2697480"/>
             <a:ext cx="2636443" cy="457200"/>
           </a:xfrm>
           <a:prstGeom prst="rect">
@@ -4467,7 +4693,7 @@
             <a:r>
               <a:rPr sz="1600" b="1" i="0">
                 <a:solidFill>
-                  <a:srgbClr val="267BC5"/>
+                  <a:srgbClr val="7BB6EA"/>
                 </a:solidFill>
               </a:rPr>
               <a:t>결혼</a:t>
@@ -4477,13 +4703,13 @@
       </p:sp>
       <p:sp>
         <p:nvSpPr>
-          <p:cNvPr id="19" name="TextBox 18"/>
+          <p:cNvPr id="21" name="TextBox 20"/>
           <p:cNvSpPr txBox="1"/>
           <p:nvPr/>
         </p:nvSpPr>
         <p:spPr>
           <a:xfrm>
-            <a:off x="8915171" y="3703320"/>
+            <a:off x="8915171" y="3886200"/>
             <a:ext cx="2545003" cy="457200"/>
           </a:xfrm>
           <a:prstGeom prst="rect">
@@ -4505,7 +4731,7 @@
             <a:r>
               <a:rPr sz="1800" b="1" i="0">
                 <a:solidFill>
-                  <a:srgbClr val="113B5F"/>
+                  <a:srgbClr val="273949"/>
                 </a:solidFill>
               </a:rPr>
               <a:t>오늘의 우리</a:t>
@@ -4515,13 +4741,13 @@
       </p:sp>
       <p:sp>
         <p:nvSpPr>
-          <p:cNvPr id="20" name="TextBox 19"/>
+          <p:cNvPr id="22" name="TextBox 21"/>
           <p:cNvSpPr txBox="1"/>
           <p:nvPr/>
         </p:nvSpPr>
         <p:spPr>
           <a:xfrm>
-            <a:off x="8915171" y="4206240"/>
+            <a:off x="8915171" y="4389120"/>
             <a:ext cx="2545003" cy="1645920"/>
           </a:xfrm>
           <a:prstGeom prst="rect">
@@ -4543,7 +4769,7 @@
             <a:r>
               <a:rPr sz="1500" b="0" i="0">
                 <a:solidFill>
-                  <a:srgbClr val="2B2B2B"/>
+                  <a:srgbClr val="26231F"/>
                 </a:solidFill>
               </a:rPr>
               <a:t>함께 시작합니다</a:t>
@@ -4565,7 +4791,7 @@
     <p:bg>
       <p:bgPr>
         <a:solidFill>
-          <a:srgbClr val="EEF5FC"/>
+          <a:srgbClr val="FFFFFF"/>
         </a:solidFill>
         <a:effectLst/>
       </p:bgPr>
@@ -4584,18 +4810,17 @@
           <p:nvPr/>
         </p:nvSpPr>
         <p:spPr>
-          <a:xfrm rot="10800000">
-            <a:off x="10637215" y="0"/>
-            <a:ext cx="914400" cy="1554480"/>
-          </a:xfrm>
-          <a:prstGeom prst="round2SameRect">
+          <a:xfrm>
+            <a:off x="640080" y="566928"/>
+            <a:ext cx="64008" cy="868680"/>
+          </a:xfrm>
+          <a:prstGeom prst="roundRect">
             <a:avLst>
-              <a:gd name="adj1" fmla="val 50000"/>
-              <a:gd name="adj2" fmla="val 0"/>
+              <a:gd name="adj" fmla="val 50000"/>
             </a:avLst>
           </a:prstGeom>
           <a:solidFill>
-            <a:srgbClr val="D1E7FA"/>
+            <a:srgbClr val="7BB6EA"/>
           </a:solidFill>
           <a:ln>
             <a:noFill/>
@@ -4611,6 +4836,73 @@
       </p:sp>
       <p:sp>
         <p:nvSpPr>
+          <p:cNvPr id="4" name="상단 라벨"/>
+          <p:cNvSpPr txBox="1"/>
+          <p:nvPr/>
+        </p:nvSpPr>
+        <p:spPr>
+          <a:xfrm>
+            <a:off x="868680" y="274320"/>
+            <a:ext cx="5486400" cy="274320"/>
+          </a:xfrm>
+          <a:prstGeom prst="rect">
+            <a:avLst/>
+          </a:prstGeom>
+          <a:noFill/>
+        </p:spPr>
+        <p:txBody>
+          <a:bodyPr wrap="square" lIns="54864" rIns="54864" tIns="27432" bIns="27432" anchor="ctr">
+            <a:noAutofit/>
+          </a:bodyPr>
+          <a:lstStyle/>
+          <a:p>
+            <a:pPr algn="l">
+              <a:lnSpc>
+                <a:spcPct val="115000"/>
+              </a:lnSpc>
+            </a:pPr>
+            <a:r>
+              <a:rPr sz="900" b="1" i="0" spc="250">
+                <a:solidFill>
+                  <a:srgbClr val="8E8780"/>
+                </a:solidFill>
+              </a:rPr>
+              <a:t>WEDDING</a:t>
+            </a:r>
+          </a:p>
+        </p:txBody>
+      </p:sp>
+      <p:sp>
+        <p:nvSpPr>
+          <p:cNvPr id="5" name="포인트"/>
+          <p:cNvSpPr/>
+          <p:nvPr/>
+        </p:nvSpPr>
+        <p:spPr>
+          <a:xfrm>
+            <a:off x="11167567" y="667512"/>
+            <a:ext cx="310896" cy="310896"/>
+          </a:xfrm>
+          <a:prstGeom prst="sun">
+            <a:avLst/>
+          </a:prstGeom>
+          <a:solidFill>
+            <a:srgbClr val="A5CFF3"/>
+          </a:solidFill>
+          <a:ln>
+            <a:noFill/>
+          </a:ln>
+        </p:spPr>
+        <p:txBody>
+          <a:bodyPr rtlCol="0" anchor="ctr"/>
+          <a:lstStyle/>
+          <a:p>
+            <a:pPr algn="ctr"/>
+          </a:p>
+        </p:txBody>
+      </p:sp>
+      <p:sp>
+        <p:nvSpPr>
           <p:cNvPr id="2" name="Title 1"/>
           <p:cNvSpPr>
             <a:spLocks noGrp="1"/>
@@ -4621,8 +4913,8 @@
         </p:nvSpPr>
         <p:spPr>
           <a:xfrm>
-            <a:off x="640080" y="457200"/>
-            <a:ext cx="9722815" cy="868680"/>
+            <a:off x="868680" y="566928"/>
+            <a:ext cx="9448495" cy="868680"/>
           </a:xfrm>
         </p:spPr>
         <p:txBody>
@@ -4639,7 +4931,7 @@
             <a:r>
               <a:rPr sz="3000" b="1" i="0">
                 <a:solidFill>
-                  <a:srgbClr val="113B5F"/>
+                  <a:srgbClr val="26231F"/>
                 </a:solidFill>
               </a:rPr>
               <a:t>우리의 첫 번째</a:t>
@@ -4649,26 +4941,24 @@
       </p:sp>
       <p:sp>
         <p:nvSpPr>
-          <p:cNvPr id="4" name="카드 1"/>
+          <p:cNvPr id="6" name="카드 1"/>
           <p:cNvSpPr/>
           <p:nvPr/>
         </p:nvSpPr>
         <p:spPr>
           <a:xfrm>
-            <a:off x="640080" y="1600200"/>
-            <a:ext cx="2556433" cy="4800600"/>
+            <a:off x="640080" y="1783080"/>
+            <a:ext cx="2556433" cy="4572000"/>
           </a:xfrm>
           <a:prstGeom prst="roundRect">
             <a:avLst>
-              <a:gd name="adj" fmla="val 8000"/>
+              <a:gd name="adj" fmla="val 7000"/>
             </a:avLst>
           </a:prstGeom>
-          <a:solidFill>
-            <a:srgbClr val="EEF5FC"/>
-          </a:solidFill>
+          <a:noFill/>
           <a:ln w="15875">
             <a:solidFill>
-              <a:srgbClr val="D1E7FA"/>
+              <a:srgbClr val="7BB6EA"/>
             </a:solidFill>
           </a:ln>
         </p:spPr>
@@ -4682,23 +4972,23 @@
       </p:sp>
       <p:sp>
         <p:nvSpPr>
-          <p:cNvPr id="5" name="번호 1"/>
+          <p:cNvPr id="7" name="번호 1"/>
           <p:cNvSpPr/>
           <p:nvPr/>
         </p:nvSpPr>
         <p:spPr>
           <a:xfrm>
-            <a:off x="822959" y="1783080"/>
+            <a:off x="822959" y="1965960"/>
             <a:ext cx="457200" cy="457200"/>
           </a:xfrm>
           <a:prstGeom prst="ellipse">
             <a:avLst/>
           </a:prstGeom>
-          <a:solidFill>
-            <a:srgbClr val="267BC5"/>
-          </a:solidFill>
-          <a:ln>
-            <a:noFill/>
+          <a:noFill/>
+          <a:ln w="19050">
+            <a:solidFill>
+              <a:srgbClr val="7BB6EA"/>
+            </a:solidFill>
           </a:ln>
         </p:spPr>
         <p:txBody>
@@ -4715,7 +5005,7 @@
             <a:r>
               <a:rPr sz="1600" b="1" i="0">
                 <a:solidFill>
-                  <a:srgbClr val="FFFFFF"/>
+                  <a:srgbClr val="273949"/>
                 </a:solidFill>
               </a:rPr>
               <a:t>1</a:t>
@@ -4725,13 +5015,13 @@
       </p:sp>
       <p:sp>
         <p:nvSpPr>
-          <p:cNvPr id="6" name="TextBox 5"/>
+          <p:cNvPr id="8" name="TextBox 7"/>
           <p:cNvSpPr txBox="1"/>
           <p:nvPr/>
         </p:nvSpPr>
         <p:spPr>
           <a:xfrm>
-            <a:off x="777240" y="2377440"/>
+            <a:off x="777240" y="2560320"/>
             <a:ext cx="2282113" cy="640080"/>
           </a:xfrm>
           <a:prstGeom prst="rect">
@@ -4753,7 +5043,7 @@
             <a:r>
               <a:rPr sz="1800" b="1" i="0">
                 <a:solidFill>
-                  <a:srgbClr val="113B5F"/>
+                  <a:srgbClr val="273949"/>
                 </a:solidFill>
               </a:rPr>
               <a:t>첫 여행</a:t>
@@ -4763,14 +5053,14 @@
       </p:sp>
       <p:sp>
         <p:nvSpPr>
-          <p:cNvPr id="7" name="TextBox 6"/>
+          <p:cNvPr id="9" name="TextBox 8"/>
           <p:cNvSpPr txBox="1"/>
           <p:nvPr/>
         </p:nvSpPr>
         <p:spPr>
           <a:xfrm>
-            <a:off x="777240" y="3063240"/>
-            <a:ext cx="2282113" cy="3200400"/>
+            <a:off x="777240" y="3246120"/>
+            <a:ext cx="2282113" cy="2971800"/>
           </a:xfrm>
           <a:prstGeom prst="rect">
             <a:avLst/>
@@ -4791,7 +5081,7 @@
             <a:r>
               <a:rPr sz="1500" b="0" i="0">
                 <a:solidFill>
-                  <a:srgbClr val="2B2B2B"/>
+                  <a:srgbClr val="26231F"/>
                 </a:solidFill>
               </a:rPr>
               <a:t>어디였나요?</a:t>
@@ -4801,26 +5091,24 @@
       </p:sp>
       <p:sp>
         <p:nvSpPr>
-          <p:cNvPr id="8" name="카드 2"/>
+          <p:cNvPr id="10" name="카드 2"/>
           <p:cNvSpPr/>
           <p:nvPr/>
         </p:nvSpPr>
         <p:spPr>
           <a:xfrm>
-            <a:off x="3425113" y="1600200"/>
-            <a:ext cx="2556433" cy="4800600"/>
+            <a:off x="3425113" y="1783080"/>
+            <a:ext cx="2556433" cy="4572000"/>
           </a:xfrm>
           <a:prstGeom prst="roundRect">
             <a:avLst>
-              <a:gd name="adj" fmla="val 8000"/>
+              <a:gd name="adj" fmla="val 7000"/>
             </a:avLst>
           </a:prstGeom>
-          <a:solidFill>
-            <a:srgbClr val="EEF5FC"/>
-          </a:solidFill>
+          <a:noFill/>
           <a:ln w="15875">
             <a:solidFill>
-              <a:srgbClr val="D1E7FA"/>
+              <a:srgbClr val="7BB6EA"/>
             </a:solidFill>
           </a:ln>
         </p:spPr>
@@ -4834,23 +5122,23 @@
       </p:sp>
       <p:sp>
         <p:nvSpPr>
-          <p:cNvPr id="9" name="번호 2"/>
+          <p:cNvPr id="11" name="번호 2"/>
           <p:cNvSpPr/>
           <p:nvPr/>
         </p:nvSpPr>
         <p:spPr>
           <a:xfrm>
-            <a:off x="3607993" y="1783080"/>
+            <a:off x="3607993" y="1965960"/>
             <a:ext cx="457200" cy="457200"/>
           </a:xfrm>
           <a:prstGeom prst="ellipse">
             <a:avLst/>
           </a:prstGeom>
-          <a:solidFill>
-            <a:srgbClr val="267BC5"/>
-          </a:solidFill>
-          <a:ln>
-            <a:noFill/>
+          <a:noFill/>
+          <a:ln w="19050">
+            <a:solidFill>
+              <a:srgbClr val="7BB6EA"/>
+            </a:solidFill>
           </a:ln>
         </p:spPr>
         <p:txBody>
@@ -4867,7 +5155,7 @@
             <a:r>
               <a:rPr sz="1600" b="1" i="0">
                 <a:solidFill>
-                  <a:srgbClr val="FFFFFF"/>
+                  <a:srgbClr val="273949"/>
                 </a:solidFill>
               </a:rPr>
               <a:t>2</a:t>
@@ -4877,13 +5165,13 @@
       </p:sp>
       <p:sp>
         <p:nvSpPr>
-          <p:cNvPr id="10" name="TextBox 9"/>
+          <p:cNvPr id="12" name="TextBox 11"/>
           <p:cNvSpPr txBox="1"/>
           <p:nvPr/>
         </p:nvSpPr>
         <p:spPr>
           <a:xfrm>
-            <a:off x="3562273" y="2377440"/>
+            <a:off x="3562273" y="2560320"/>
             <a:ext cx="2282113" cy="640080"/>
           </a:xfrm>
           <a:prstGeom prst="rect">
@@ -4905,7 +5193,7 @@
             <a:r>
               <a:rPr sz="1800" b="1" i="0">
                 <a:solidFill>
-                  <a:srgbClr val="113B5F"/>
+                  <a:srgbClr val="273949"/>
                 </a:solidFill>
               </a:rPr>
               <a:t>첫 선물</a:t>
@@ -4915,14 +5203,14 @@
       </p:sp>
       <p:sp>
         <p:nvSpPr>
-          <p:cNvPr id="11" name="TextBox 10"/>
+          <p:cNvPr id="13" name="TextBox 12"/>
           <p:cNvSpPr txBox="1"/>
           <p:nvPr/>
         </p:nvSpPr>
         <p:spPr>
           <a:xfrm>
-            <a:off x="3562273" y="3063240"/>
-            <a:ext cx="2282113" cy="3200400"/>
+            <a:off x="3562273" y="3246120"/>
+            <a:ext cx="2282113" cy="2971800"/>
           </a:xfrm>
           <a:prstGeom prst="rect">
             <a:avLst/>
@@ -4943,7 +5231,7 @@
             <a:r>
               <a:rPr sz="1500" b="0" i="0">
                 <a:solidFill>
-                  <a:srgbClr val="2B2B2B"/>
+                  <a:srgbClr val="26231F"/>
                 </a:solidFill>
               </a:rPr>
               <a:t>무엇이었나요?</a:t>
@@ -4953,26 +5241,24 @@
       </p:sp>
       <p:sp>
         <p:nvSpPr>
-          <p:cNvPr id="12" name="카드 3"/>
+          <p:cNvPr id="14" name="카드 3"/>
           <p:cNvSpPr/>
           <p:nvPr/>
         </p:nvSpPr>
         <p:spPr>
           <a:xfrm>
-            <a:off x="6210147" y="1600200"/>
-            <a:ext cx="2556433" cy="4800600"/>
+            <a:off x="6210147" y="1783080"/>
+            <a:ext cx="2556433" cy="4572000"/>
           </a:xfrm>
           <a:prstGeom prst="roundRect">
             <a:avLst>
-              <a:gd name="adj" fmla="val 8000"/>
+              <a:gd name="adj" fmla="val 7000"/>
             </a:avLst>
           </a:prstGeom>
-          <a:solidFill>
-            <a:srgbClr val="EEF5FC"/>
-          </a:solidFill>
+          <a:noFill/>
           <a:ln w="15875">
             <a:solidFill>
-              <a:srgbClr val="D1E7FA"/>
+              <a:srgbClr val="7BB6EA"/>
             </a:solidFill>
           </a:ln>
         </p:spPr>
@@ -4986,23 +5272,23 @@
       </p:sp>
       <p:sp>
         <p:nvSpPr>
-          <p:cNvPr id="13" name="번호 3"/>
+          <p:cNvPr id="15" name="번호 3"/>
           <p:cNvSpPr/>
           <p:nvPr/>
         </p:nvSpPr>
         <p:spPr>
           <a:xfrm>
-            <a:off x="6393027" y="1783080"/>
+            <a:off x="6393027" y="1965960"/>
             <a:ext cx="457200" cy="457200"/>
           </a:xfrm>
           <a:prstGeom prst="ellipse">
             <a:avLst/>
           </a:prstGeom>
-          <a:solidFill>
-            <a:srgbClr val="267BC5"/>
-          </a:solidFill>
-          <a:ln>
-            <a:noFill/>
+          <a:noFill/>
+          <a:ln w="19050">
+            <a:solidFill>
+              <a:srgbClr val="7BB6EA"/>
+            </a:solidFill>
           </a:ln>
         </p:spPr>
         <p:txBody>
@@ -5019,7 +5305,7 @@
             <a:r>
               <a:rPr sz="1600" b="1" i="0">
                 <a:solidFill>
-                  <a:srgbClr val="FFFFFF"/>
+                  <a:srgbClr val="273949"/>
                 </a:solidFill>
               </a:rPr>
               <a:t>3</a:t>
@@ -5029,13 +5315,13 @@
       </p:sp>
       <p:sp>
         <p:nvSpPr>
-          <p:cNvPr id="14" name="TextBox 13"/>
+          <p:cNvPr id="16" name="TextBox 15"/>
           <p:cNvSpPr txBox="1"/>
           <p:nvPr/>
         </p:nvSpPr>
         <p:spPr>
           <a:xfrm>
-            <a:off x="6347307" y="2377440"/>
+            <a:off x="6347307" y="2560320"/>
             <a:ext cx="2282113" cy="640080"/>
           </a:xfrm>
           <a:prstGeom prst="rect">
@@ -5057,7 +5343,7 @@
             <a:r>
               <a:rPr sz="1800" b="1" i="0">
                 <a:solidFill>
-                  <a:srgbClr val="113B5F"/>
+                  <a:srgbClr val="273949"/>
                 </a:solidFill>
               </a:rPr>
               <a:t>첫 다툼</a:t>
@@ -5067,14 +5353,14 @@
       </p:sp>
       <p:sp>
         <p:nvSpPr>
-          <p:cNvPr id="15" name="TextBox 14"/>
+          <p:cNvPr id="17" name="TextBox 16"/>
           <p:cNvSpPr txBox="1"/>
           <p:nvPr/>
         </p:nvSpPr>
         <p:spPr>
           <a:xfrm>
-            <a:off x="6347307" y="3063240"/>
-            <a:ext cx="2282113" cy="3200400"/>
+            <a:off x="6347307" y="3246120"/>
+            <a:ext cx="2282113" cy="2971800"/>
           </a:xfrm>
           <a:prstGeom prst="rect">
             <a:avLst/>
@@ -5095,7 +5381,7 @@
             <a:r>
               <a:rPr sz="1500" b="0" i="0">
                 <a:solidFill>
-                  <a:srgbClr val="2B2B2B"/>
+                  <a:srgbClr val="26231F"/>
                 </a:solidFill>
               </a:rPr>
               <a:t>어떻게 풀었나요?</a:t>
@@ -5105,26 +5391,24 @@
       </p:sp>
       <p:sp>
         <p:nvSpPr>
-          <p:cNvPr id="16" name="카드 4"/>
+          <p:cNvPr id="18" name="카드 4"/>
           <p:cNvSpPr/>
           <p:nvPr/>
         </p:nvSpPr>
         <p:spPr>
           <a:xfrm>
-            <a:off x="8995181" y="1600200"/>
-            <a:ext cx="2556433" cy="4800600"/>
+            <a:off x="8995181" y="1783080"/>
+            <a:ext cx="2556433" cy="4572000"/>
           </a:xfrm>
           <a:prstGeom prst="roundRect">
             <a:avLst>
-              <a:gd name="adj" fmla="val 8000"/>
+              <a:gd name="adj" fmla="val 7000"/>
             </a:avLst>
           </a:prstGeom>
-          <a:solidFill>
-            <a:srgbClr val="EEF5FC"/>
-          </a:solidFill>
+          <a:noFill/>
           <a:ln w="15875">
             <a:solidFill>
-              <a:srgbClr val="D1E7FA"/>
+              <a:srgbClr val="7BB6EA"/>
             </a:solidFill>
           </a:ln>
         </p:spPr>
@@ -5138,23 +5422,23 @@
       </p:sp>
       <p:sp>
         <p:nvSpPr>
-          <p:cNvPr id="17" name="번호 4"/>
+          <p:cNvPr id="19" name="번호 4"/>
           <p:cNvSpPr/>
           <p:nvPr/>
         </p:nvSpPr>
         <p:spPr>
           <a:xfrm>
-            <a:off x="9178061" y="1783080"/>
+            <a:off x="9178061" y="1965960"/>
             <a:ext cx="457200" cy="457200"/>
           </a:xfrm>
           <a:prstGeom prst="ellipse">
             <a:avLst/>
           </a:prstGeom>
-          <a:solidFill>
-            <a:srgbClr val="267BC5"/>
-          </a:solidFill>
-          <a:ln>
-            <a:noFill/>
+          <a:noFill/>
+          <a:ln w="19050">
+            <a:solidFill>
+              <a:srgbClr val="7BB6EA"/>
+            </a:solidFill>
           </a:ln>
         </p:spPr>
         <p:txBody>
@@ -5171,7 +5455,7 @@
             <a:r>
               <a:rPr sz="1600" b="1" i="0">
                 <a:solidFill>
-                  <a:srgbClr val="FFFFFF"/>
+                  <a:srgbClr val="273949"/>
                 </a:solidFill>
               </a:rPr>
               <a:t>4</a:t>
@@ -5181,13 +5465,13 @@
       </p:sp>
       <p:sp>
         <p:nvSpPr>
-          <p:cNvPr id="18" name="TextBox 17"/>
+          <p:cNvPr id="20" name="TextBox 19"/>
           <p:cNvSpPr txBox="1"/>
           <p:nvPr/>
         </p:nvSpPr>
         <p:spPr>
           <a:xfrm>
-            <a:off x="9132341" y="2377440"/>
+            <a:off x="9132341" y="2560320"/>
             <a:ext cx="2282113" cy="640080"/>
           </a:xfrm>
           <a:prstGeom prst="rect">
@@ -5209,7 +5493,7 @@
             <a:r>
               <a:rPr sz="1800" b="1" i="0">
                 <a:solidFill>
-                  <a:srgbClr val="113B5F"/>
+                  <a:srgbClr val="273949"/>
                 </a:solidFill>
               </a:rPr>
               <a:t>첫 약속</a:t>
@@ -5219,14 +5503,14 @@
       </p:sp>
       <p:sp>
         <p:nvSpPr>
-          <p:cNvPr id="19" name="TextBox 18"/>
+          <p:cNvPr id="21" name="TextBox 20"/>
           <p:cNvSpPr txBox="1"/>
           <p:nvPr/>
         </p:nvSpPr>
         <p:spPr>
           <a:xfrm>
-            <a:off x="9132341" y="3063240"/>
-            <a:ext cx="2282113" cy="3200400"/>
+            <a:off x="9132341" y="3246120"/>
+            <a:ext cx="2282113" cy="2971800"/>
           </a:xfrm>
           <a:prstGeom prst="rect">
             <a:avLst/>
@@ -5247,7 +5531,7 @@
             <a:r>
               <a:rPr sz="1500" b="0" i="0">
                 <a:solidFill>
-                  <a:srgbClr val="2B2B2B"/>
+                  <a:srgbClr val="26231F"/>
                 </a:solidFill>
               </a:rPr>
               <a:t>무엇이었나요?</a:t>
@@ -5269,7 +5553,7 @@
     <p:bg>
       <p:bgPr>
         <a:solidFill>
-          <a:srgbClr val="EEF5FC"/>
+          <a:srgbClr val="FFFFFF"/>
         </a:solidFill>
         <a:effectLst/>
       </p:bgPr>
@@ -5288,18 +5572,17 @@
           <p:nvPr/>
         </p:nvSpPr>
         <p:spPr>
-          <a:xfrm rot="10800000">
-            <a:off x="10637215" y="0"/>
-            <a:ext cx="914400" cy="1554480"/>
-          </a:xfrm>
-          <a:prstGeom prst="round2SameRect">
+          <a:xfrm>
+            <a:off x="640080" y="566928"/>
+            <a:ext cx="64008" cy="868680"/>
+          </a:xfrm>
+          <a:prstGeom prst="roundRect">
             <a:avLst>
-              <a:gd name="adj1" fmla="val 50000"/>
-              <a:gd name="adj2" fmla="val 0"/>
+              <a:gd name="adj" fmla="val 50000"/>
             </a:avLst>
           </a:prstGeom>
           <a:solidFill>
-            <a:srgbClr val="D1E7FA"/>
+            <a:srgbClr val="7BB6EA"/>
           </a:solidFill>
           <a:ln>
             <a:noFill/>
@@ -5315,6 +5598,73 @@
       </p:sp>
       <p:sp>
         <p:nvSpPr>
+          <p:cNvPr id="4" name="상단 라벨"/>
+          <p:cNvSpPr txBox="1"/>
+          <p:nvPr/>
+        </p:nvSpPr>
+        <p:spPr>
+          <a:xfrm>
+            <a:off x="868680" y="274320"/>
+            <a:ext cx="5486400" cy="274320"/>
+          </a:xfrm>
+          <a:prstGeom prst="rect">
+            <a:avLst/>
+          </a:prstGeom>
+          <a:noFill/>
+        </p:spPr>
+        <p:txBody>
+          <a:bodyPr wrap="square" lIns="54864" rIns="54864" tIns="27432" bIns="27432" anchor="ctr">
+            <a:noAutofit/>
+          </a:bodyPr>
+          <a:lstStyle/>
+          <a:p>
+            <a:pPr algn="l">
+              <a:lnSpc>
+                <a:spcPct val="115000"/>
+              </a:lnSpc>
+            </a:pPr>
+            <a:r>
+              <a:rPr sz="900" b="1" i="0" spc="250">
+                <a:solidFill>
+                  <a:srgbClr val="8E8780"/>
+                </a:solidFill>
+              </a:rPr>
+              <a:t>WEDDING</a:t>
+            </a:r>
+          </a:p>
+        </p:txBody>
+      </p:sp>
+      <p:sp>
+        <p:nvSpPr>
+          <p:cNvPr id="5" name="포인트"/>
+          <p:cNvSpPr/>
+          <p:nvPr/>
+        </p:nvSpPr>
+        <p:spPr>
+          <a:xfrm>
+            <a:off x="11167567" y="667512"/>
+            <a:ext cx="310896" cy="310896"/>
+          </a:xfrm>
+          <a:prstGeom prst="sun">
+            <a:avLst/>
+          </a:prstGeom>
+          <a:solidFill>
+            <a:srgbClr val="A5CFF3"/>
+          </a:solidFill>
+          <a:ln>
+            <a:noFill/>
+          </a:ln>
+        </p:spPr>
+        <p:txBody>
+          <a:bodyPr rtlCol="0" anchor="ctr"/>
+          <a:lstStyle/>
+          <a:p>
+            <a:pPr algn="ctr"/>
+          </a:p>
+        </p:txBody>
+      </p:sp>
+      <p:sp>
+        <p:nvSpPr>
           <p:cNvPr id="2" name="Title 1"/>
           <p:cNvSpPr>
             <a:spLocks noGrp="1"/>
@@ -5325,8 +5675,8 @@
         </p:nvSpPr>
         <p:spPr>
           <a:xfrm>
-            <a:off x="640080" y="457200"/>
-            <a:ext cx="9722815" cy="868680"/>
+            <a:off x="868680" y="566928"/>
+            <a:ext cx="9448495" cy="868680"/>
           </a:xfrm>
         </p:spPr>
         <p:txBody>
@@ -5343,7 +5693,7 @@
             <a:r>
               <a:rPr sz="3000" b="1" i="0">
                 <a:solidFill>
-                  <a:srgbClr val="113B5F"/>
+                  <a:srgbClr val="26231F"/>
                 </a:solidFill>
               </a:rPr>
               <a:t>웨딩 사진</a:t>
@@ -5353,14 +5703,14 @@
       </p:sp>
       <p:sp>
         <p:nvSpPr>
-          <p:cNvPr id="4" name="사진 자리"/>
+          <p:cNvPr id="6" name="사진 자리"/>
           <p:cNvSpPr/>
           <p:nvPr/>
         </p:nvSpPr>
         <p:spPr>
           <a:xfrm>
-            <a:off x="640080" y="1600200"/>
-            <a:ext cx="3515258" cy="2308860"/>
+            <a:off x="640080" y="1783080"/>
+            <a:ext cx="3515258" cy="2194560"/>
           </a:xfrm>
           <a:prstGeom prst="roundRect">
             <a:avLst>
@@ -5371,9 +5721,7 @@
             <a:srgbClr val="D1E7FA"/>
           </a:solidFill>
           <a:ln w="19050">
-            <a:solidFill>
-              <a:srgbClr val="267BC5"/>
-            </a:solidFill>
+            <a:noFill/>
             <a:prstDash val="dash"/>
           </a:ln>
         </p:spPr>
@@ -5391,7 +5739,7 @@
             <a:r>
               <a:rPr sz="1200" b="0" i="0">
                 <a:solidFill>
-                  <a:srgbClr val="113B5F"/>
+                  <a:srgbClr val="8E8780"/>
                 </a:solidFill>
               </a:rPr>
               <a:t>사진 1</a:t>
@@ -5401,14 +5749,14 @@
       </p:sp>
       <p:sp>
         <p:nvSpPr>
-          <p:cNvPr id="5" name="사진 자리"/>
+          <p:cNvPr id="7" name="사진 자리"/>
           <p:cNvSpPr/>
           <p:nvPr/>
         </p:nvSpPr>
         <p:spPr>
           <a:xfrm>
-            <a:off x="4338218" y="1600200"/>
-            <a:ext cx="3515258" cy="2308860"/>
+            <a:off x="4338218" y="1783080"/>
+            <a:ext cx="3515258" cy="2194560"/>
           </a:xfrm>
           <a:prstGeom prst="roundRect">
             <a:avLst>
@@ -5419,9 +5767,7 @@
             <a:srgbClr val="D1E7FA"/>
           </a:solidFill>
           <a:ln w="19050">
-            <a:solidFill>
-              <a:srgbClr val="267BC5"/>
-            </a:solidFill>
+            <a:noFill/>
             <a:prstDash val="dash"/>
           </a:ln>
         </p:spPr>
@@ -5439,7 +5785,7 @@
             <a:r>
               <a:rPr sz="1200" b="0" i="0">
                 <a:solidFill>
-                  <a:srgbClr val="113B5F"/>
+                  <a:srgbClr val="8E8780"/>
                 </a:solidFill>
               </a:rPr>
               <a:t>사진 2</a:t>
@@ -5449,14 +5795,14 @@
       </p:sp>
       <p:sp>
         <p:nvSpPr>
-          <p:cNvPr id="6" name="사진 자리"/>
+          <p:cNvPr id="8" name="사진 자리"/>
           <p:cNvSpPr/>
           <p:nvPr/>
         </p:nvSpPr>
         <p:spPr>
           <a:xfrm>
-            <a:off x="8036356" y="1600200"/>
-            <a:ext cx="3515258" cy="2308860"/>
+            <a:off x="8036356" y="1783080"/>
+            <a:ext cx="3515258" cy="2194560"/>
           </a:xfrm>
           <a:prstGeom prst="roundRect">
             <a:avLst>
@@ -5467,9 +5813,7 @@
             <a:srgbClr val="D1E7FA"/>
           </a:solidFill>
           <a:ln w="19050">
-            <a:solidFill>
-              <a:srgbClr val="267BC5"/>
-            </a:solidFill>
+            <a:noFill/>
             <a:prstDash val="dash"/>
           </a:ln>
         </p:spPr>
@@ -5487,7 +5831,7 @@
             <a:r>
               <a:rPr sz="1200" b="0" i="0">
                 <a:solidFill>
-                  <a:srgbClr val="113B5F"/>
+                  <a:srgbClr val="8E8780"/>
                 </a:solidFill>
               </a:rPr>
               <a:t>사진 3</a:t>
@@ -5497,14 +5841,14 @@
       </p:sp>
       <p:sp>
         <p:nvSpPr>
-          <p:cNvPr id="7" name="사진 자리"/>
+          <p:cNvPr id="9" name="사진 자리"/>
           <p:cNvSpPr/>
           <p:nvPr/>
         </p:nvSpPr>
         <p:spPr>
           <a:xfrm>
-            <a:off x="640080" y="4091939"/>
-            <a:ext cx="3515258" cy="2308860"/>
+            <a:off x="640080" y="4160520"/>
+            <a:ext cx="3515258" cy="2194560"/>
           </a:xfrm>
           <a:prstGeom prst="roundRect">
             <a:avLst>
@@ -5515,9 +5859,7 @@
             <a:srgbClr val="D1E7FA"/>
           </a:solidFill>
           <a:ln w="19050">
-            <a:solidFill>
-              <a:srgbClr val="267BC5"/>
-            </a:solidFill>
+            <a:noFill/>
             <a:prstDash val="dash"/>
           </a:ln>
         </p:spPr>
@@ -5535,7 +5877,7 @@
             <a:r>
               <a:rPr sz="1200" b="0" i="0">
                 <a:solidFill>
-                  <a:srgbClr val="113B5F"/>
+                  <a:srgbClr val="8E8780"/>
                 </a:solidFill>
               </a:rPr>
               <a:t>사진 4</a:t>
@@ -5545,14 +5887,14 @@
       </p:sp>
       <p:sp>
         <p:nvSpPr>
-          <p:cNvPr id="8" name="사진 자리"/>
+          <p:cNvPr id="10" name="사진 자리"/>
           <p:cNvSpPr/>
           <p:nvPr/>
         </p:nvSpPr>
         <p:spPr>
           <a:xfrm>
-            <a:off x="4338218" y="4091939"/>
-            <a:ext cx="3515258" cy="2308860"/>
+            <a:off x="4338218" y="4160520"/>
+            <a:ext cx="3515258" cy="2194560"/>
           </a:xfrm>
           <a:prstGeom prst="roundRect">
             <a:avLst>
@@ -5563,9 +5905,7 @@
             <a:srgbClr val="D1E7FA"/>
           </a:solidFill>
           <a:ln w="19050">
-            <a:solidFill>
-              <a:srgbClr val="267BC5"/>
-            </a:solidFill>
+            <a:noFill/>
             <a:prstDash val="dash"/>
           </a:ln>
         </p:spPr>
@@ -5583,7 +5923,7 @@
             <a:r>
               <a:rPr sz="1200" b="0" i="0">
                 <a:solidFill>
-                  <a:srgbClr val="113B5F"/>
+                  <a:srgbClr val="8E8780"/>
                 </a:solidFill>
               </a:rPr>
               <a:t>사진 5</a:t>
@@ -5593,14 +5933,14 @@
       </p:sp>
       <p:sp>
         <p:nvSpPr>
-          <p:cNvPr id="9" name="사진 자리"/>
+          <p:cNvPr id="11" name="사진 자리"/>
           <p:cNvSpPr/>
           <p:nvPr/>
         </p:nvSpPr>
         <p:spPr>
           <a:xfrm>
-            <a:off x="8036356" y="4091939"/>
-            <a:ext cx="3515258" cy="2308860"/>
+            <a:off x="8036356" y="4160520"/>
+            <a:ext cx="3515258" cy="2194560"/>
           </a:xfrm>
           <a:prstGeom prst="roundRect">
             <a:avLst>
@@ -5611,9 +5951,7 @@
             <a:srgbClr val="D1E7FA"/>
           </a:solidFill>
           <a:ln w="19050">
-            <a:solidFill>
-              <a:srgbClr val="267BC5"/>
-            </a:solidFill>
+            <a:noFill/>
             <a:prstDash val="dash"/>
           </a:ln>
         </p:spPr>
@@ -5631,7 +5969,7 @@
             <a:r>
               <a:rPr sz="1200" b="0" i="0">
                 <a:solidFill>
-                  <a:srgbClr val="113B5F"/>
+                  <a:srgbClr val="8E8780"/>
                 </a:solidFill>
               </a:rPr>
               <a:t>사진 6</a:t>
@@ -5650,6 +5988,14 @@
 <file path=ppt/slides/slide6.xml><?xml version="1.0" encoding="utf-8"?>
 <p:sld xmlns:a="http://schemas.openxmlformats.org/drawingml/2006/main" xmlns:p="http://schemas.openxmlformats.org/presentationml/2006/main" xmlns:r="http://schemas.openxmlformats.org/officeDocument/2006/relationships">
   <p:cSld>
+    <p:bg>
+      <p:bgPr>
+        <a:solidFill>
+          <a:srgbClr val="EAF4FD"/>
+        </a:solidFill>
+        <a:effectLst/>
+      </p:bgPr>
+    </p:bg>
     <p:spTree>
       <p:nvGrpSpPr>
         <p:cNvPr id="1" name=""/>
@@ -5657,30 +6003,120 @@
         <p:nvPr/>
       </p:nvGrpSpPr>
       <p:grpSpPr/>
-      <p:pic>
-        <p:nvPicPr>
-          <p:cNvPr id="3" name="표지 그림" descr="wedding-22.jpg"/>
-          <p:cNvPicPr>
-            <a:picLocks noChangeAspect="1"/>
-          </p:cNvPicPr>
-          <p:nvPr/>
-        </p:nvPicPr>
-        <p:blipFill>
-          <a:blip r:embed="rId2"/>
-          <a:stretch>
-            <a:fillRect/>
-          </a:stretch>
-        </p:blipFill>
-        <p:spPr>
-          <a:xfrm>
-            <a:off x="0" y="0"/>
-            <a:ext cx="12191695" cy="6858000"/>
+      <p:sp>
+        <p:nvSpPr>
+          <p:cNvPr id="3" name="사진 자리"/>
+          <p:cNvSpPr/>
+          <p:nvPr/>
+        </p:nvSpPr>
+        <p:spPr>
+          <a:xfrm>
+            <a:off x="1463003" y="960120"/>
+            <a:ext cx="3657508" cy="4526280"/>
+          </a:xfrm>
+          <a:prstGeom prst="roundRect">
+            <a:avLst>
+              <a:gd name="adj" fmla="val 4000"/>
+            </a:avLst>
+          </a:prstGeom>
+          <a:solidFill>
+            <a:srgbClr val="A5CFF3"/>
+          </a:solidFill>
+          <a:ln>
+            <a:noFill/>
+          </a:ln>
+        </p:spPr>
+        <p:txBody>
+          <a:bodyPr rtlCol="0" anchor="ctr" wrap="square" lIns="54864" rIns="54864" tIns="27432" bIns="27432">
+            <a:noAutofit/>
+          </a:bodyPr>
+          <a:lstStyle/>
+          <a:p>
+            <a:pPr algn="ctr">
+              <a:lnSpc>
+                <a:spcPct val="100000"/>
+              </a:lnSpc>
+            </a:pPr>
+            <a:r>
+              <a:rPr sz="1400" b="0" i="0">
+                <a:solidFill>
+                  <a:srgbClr val="273949"/>
+                </a:solidFill>
+              </a:rPr>
+              <a:t>사진을 넣어 주세요</a:t>
+            </a:r>
+          </a:p>
+        </p:txBody>
+      </p:sp>
+      <p:sp>
+        <p:nvSpPr>
+          <p:cNvPr id="4" name="장식"/>
+          <p:cNvSpPr/>
+          <p:nvPr/>
+        </p:nvSpPr>
+        <p:spPr>
+          <a:xfrm>
+            <a:off x="975335" y="1234439"/>
+            <a:ext cx="3657508" cy="4526280"/>
+          </a:xfrm>
+          <a:prstGeom prst="roundRect">
+            <a:avLst>
+              <a:gd name="adj" fmla="val 4000"/>
+            </a:avLst>
+          </a:prstGeom>
+          <a:noFill/>
+          <a:ln w="9525">
+            <a:solidFill>
+              <a:srgbClr val="26231F"/>
+            </a:solidFill>
+          </a:ln>
+        </p:spPr>
+        <p:txBody>
+          <a:bodyPr rtlCol="0" anchor="ctr"/>
+          <a:lstStyle/>
+          <a:p>
+            <a:pPr algn="ctr"/>
+          </a:p>
+        </p:txBody>
+      </p:sp>
+      <p:sp>
+        <p:nvSpPr>
+          <p:cNvPr id="5" name="라벨"/>
+          <p:cNvSpPr txBox="1"/>
+          <p:nvPr/>
+        </p:nvSpPr>
+        <p:spPr>
+          <a:xfrm>
+            <a:off x="6827349" y="2148840"/>
+            <a:ext cx="4632844" cy="274320"/>
           </a:xfrm>
           <a:prstGeom prst="rect">
             <a:avLst/>
           </a:prstGeom>
-        </p:spPr>
-      </p:pic>
+          <a:noFill/>
+        </p:spPr>
+        <p:txBody>
+          <a:bodyPr wrap="square" lIns="54864" rIns="54864" tIns="27432" bIns="27432" anchor="t">
+            <a:noAutofit/>
+          </a:bodyPr>
+          <a:lstStyle/>
+          <a:p>
+            <a:pPr algn="l">
+              <a:lnSpc>
+                <a:spcPct val="115000"/>
+              </a:lnSpc>
+            </a:pPr>
+            <a:r>
+              <a:rPr sz="1000" b="1" i="0" spc="250">
+                <a:solidFill>
+                  <a:srgbClr val="26231F"/>
+                </a:solidFill>
+              </a:rPr>
+              <a:t>WEDDING</a:t>
+            </a:r>
+          </a:p>
+        </p:txBody>
+      </p:sp>
       <p:sp>
         <p:nvSpPr>
           <p:cNvPr id="2" name="Title 1"/>
@@ -5693,8 +6129,8 @@
         </p:nvSpPr>
         <p:spPr>
           <a:xfrm>
-            <a:off x="853418" y="2057400"/>
-            <a:ext cx="6095847" cy="1554480"/>
+            <a:off x="6827349" y="2606040"/>
+            <a:ext cx="4632844" cy="1188720"/>
           </a:xfrm>
         </p:spPr>
         <p:txBody>
@@ -5711,7 +6147,7 @@
             <a:r>
               <a:rPr sz="3400" b="1" i="0">
                 <a:solidFill>
-                  <a:srgbClr val="113B5F"/>
+                  <a:srgbClr val="26231F"/>
                 </a:solidFill>
               </a:rPr>
               <a:t>와 주셔서 고맙습니다</a:t>
@@ -5721,14 +6157,14 @@
       </p:sp>
       <p:sp>
         <p:nvSpPr>
-          <p:cNvPr id="4" name="한 줄 문구"/>
+          <p:cNvPr id="6" name="한 줄 문구"/>
           <p:cNvSpPr txBox="1"/>
           <p:nvPr/>
         </p:nvSpPr>
         <p:spPr>
           <a:xfrm>
-            <a:off x="853418" y="3749039"/>
-            <a:ext cx="6095847" cy="822960"/>
+            <a:off x="6827349" y="3886200"/>
+            <a:ext cx="4632844" cy="822960"/>
           </a:xfrm>
           <a:prstGeom prst="rect">
             <a:avLst/>
@@ -5747,9 +6183,9 @@
               </a:lnSpc>
             </a:pPr>
             <a:r>
-              <a:rPr sz="1700" b="0" i="1">
-                <a:solidFill>
-                  <a:srgbClr val="113B5F"/>
+              <a:rPr sz="1700" b="0" i="0">
+                <a:solidFill>
+                  <a:srgbClr val="26231F"/>
                 </a:solidFill>
               </a:rPr>
               <a:t>잘 살겠습니다</a:t>
@@ -5759,14 +6195,14 @@
       </p:sp>
       <p:sp>
         <p:nvSpPr>
-          <p:cNvPr id="5" name="안내 문구"/>
+          <p:cNvPr id="7" name="안내 문구"/>
           <p:cNvSpPr txBox="1"/>
           <p:nvPr/>
         </p:nvSpPr>
         <p:spPr>
           <a:xfrm>
-            <a:off x="853418" y="4617720"/>
-            <a:ext cx="6095847" cy="914400"/>
+            <a:off x="6827349" y="4754880"/>
+            <a:ext cx="4632844" cy="914400"/>
           </a:xfrm>
           <a:prstGeom prst="rect">
             <a:avLst/>
@@ -5787,7 +6223,7 @@
             <a:r>
               <a:rPr sz="1400" b="0" i="0">
                 <a:solidFill>
-                  <a:srgbClr val="666666"/>
+                  <a:srgbClr val="26231F"/>
                 </a:solidFill>
               </a:rPr>
               <a:t>신랑 이름 ♥ 신부 이름</a:t>
@@ -5814,34 +6250,34 @@
         <a:sysClr val="window" lastClr="FFFFFF"/>
       </a:lt1>
       <a:dk2>
-        <a:srgbClr val="113B5F"/>
+        <a:srgbClr val="273949"/>
       </a:dk2>
       <a:lt2>
-        <a:srgbClr val="EEF5FC"/>
+        <a:srgbClr val="EAF4FD"/>
       </a:lt2>
       <a:accent1>
-        <a:srgbClr val="267BC5"/>
+        <a:srgbClr val="7BB6EA"/>
       </a:accent1>
       <a:accent2>
-        <a:srgbClr val="209DB6"/>
+        <a:srgbClr val="9FA4EF"/>
       </a:accent2>
       <a:accent3>
-        <a:srgbClr val="113B5F"/>
+        <a:srgbClr val="273949"/>
       </a:accent3>
       <a:accent4>
         <a:srgbClr val="D1E7FA"/>
       </a:accent4>
       <a:accent5>
-        <a:srgbClr val="238CBE"/>
+        <a:srgbClr val="8DADEC"/>
       </a:accent5>
       <a:accent6>
-        <a:srgbClr val="70899F"/>
+        <a:srgbClr val="7D8892"/>
       </a:accent6>
       <a:hlink>
-        <a:srgbClr val="267BC5"/>
+        <a:srgbClr val="7BB6EA"/>
       </a:hlink>
       <a:folHlink>
-        <a:srgbClr val="113B5F"/>
+        <a:srgbClr val="273949"/>
       </a:folHlink>
     </a:clrScheme>
     <a:fontScheme name="Office">
